--- a/slides/3-12_other_perioperative_drugs/3-12_other_perioperative_drugs.pptx
+++ b/slides/3-12_other_perioperative_drugs/3-12_other_perioperative_drugs.pptx
@@ -2199,7 +2199,7 @@
           </a:xfrm>
           <a:prstGeom prst="roundRect">
             <a:avLst>
-              <a:gd name="adj" fmla="val 15625"/>
+              <a:gd name="adj" fmla="val 7813"/>
             </a:avLst>
           </a:prstGeom>
           <a:solidFill>
@@ -2215,7 +2215,7 @@
               <a:buNone/>
             </a:pPr>
             <a:r>
-              <a:rPr lang="ja-JP" altLang="en-US" sz="1100" b="1" dirty="0">
+              <a:rPr lang="ja-JP" altLang="en-US" sz="1050" b="1" dirty="0">
                 <a:solidFill>
                   <a:srgbClr val="FFFFFF"/>
                 </a:solidFill>
@@ -2225,14 +2225,14 @@
               </a:rPr>
               <a:t>予防的</a:t>
             </a:r>
-            <a:endParaRPr lang="ja-JP" sz="1100" dirty="0"/>
+            <a:endParaRPr lang="ja-JP" sz="1050" dirty="0"/>
           </a:p>
           <a:p>
             <a:pPr algn="ctr" indent="0" marL="0">
               <a:buNone/>
             </a:pPr>
             <a:r>
-              <a:rPr lang="ja-JP" altLang="en-US" sz="1100" b="1" dirty="0">
+              <a:rPr lang="ja-JP" altLang="en-US" sz="1050" b="1" dirty="0">
                 <a:solidFill>
                   <a:srgbClr val="FFFFFF"/>
                 </a:solidFill>
@@ -2242,7 +2242,7 @@
               </a:rPr>
               <a:t>抗菌薬</a:t>
             </a:r>
-            <a:endParaRPr lang="ja-JP" sz="1100" dirty="0"/>
+            <a:endParaRPr lang="ja-JP" sz="1050" dirty="0"/>
           </a:p>
         </p:txBody>
       </p:sp>
@@ -2259,7 +2259,7 @@
           </a:xfrm>
           <a:prstGeom prst="roundRect">
             <a:avLst>
-              <a:gd name="adj" fmla="val 15625"/>
+              <a:gd name="adj" fmla="val 7813"/>
             </a:avLst>
           </a:prstGeom>
           <a:solidFill>
@@ -2275,7 +2275,7 @@
               <a:buNone/>
             </a:pPr>
             <a:r>
-              <a:rPr lang="ja-JP" altLang="en-US" sz="1100" dirty="0">
+              <a:rPr lang="ja-JP" altLang="en-US" sz="1050" dirty="0">
                 <a:solidFill>
                   <a:srgbClr val="404040"/>
                 </a:solidFill>
@@ -2285,14 +2285,14 @@
               </a:rPr>
               <a:t>抗コリン</a:t>
             </a:r>
-            <a:endParaRPr lang="ja-JP" sz="1100" dirty="0"/>
+            <a:endParaRPr lang="ja-JP" sz="1050" dirty="0"/>
           </a:p>
           <a:p>
             <a:pPr algn="ctr" indent="0" marL="0">
               <a:buNone/>
             </a:pPr>
             <a:r>
-              <a:rPr lang="ja-JP" altLang="en-US" sz="1100" dirty="0">
+              <a:rPr lang="ja-JP" altLang="en-US" sz="1050" dirty="0">
                 <a:solidFill>
                   <a:srgbClr val="404040"/>
                 </a:solidFill>
@@ -2302,7 +2302,7 @@
               </a:rPr>
               <a:t>薬</a:t>
             </a:r>
-            <a:endParaRPr lang="ja-JP" sz="1100" dirty="0"/>
+            <a:endParaRPr lang="ja-JP" sz="1050" dirty="0"/>
           </a:p>
         </p:txBody>
       </p:sp>
@@ -2319,7 +2319,7 @@
           </a:xfrm>
           <a:prstGeom prst="roundRect">
             <a:avLst>
-              <a:gd name="adj" fmla="val 15625"/>
+              <a:gd name="adj" fmla="val 7813"/>
             </a:avLst>
           </a:prstGeom>
           <a:solidFill>
@@ -2335,7 +2335,7 @@
               <a:buNone/>
             </a:pPr>
             <a:r>
-              <a:rPr lang="ja-JP" altLang="en-US" sz="1100" dirty="0">
+              <a:rPr lang="ja-JP" altLang="en-US" sz="1050" dirty="0">
                 <a:solidFill>
                   <a:srgbClr val="404040"/>
                 </a:solidFill>
@@ -2345,14 +2345,14 @@
               </a:rPr>
               <a:t>ステロ</a:t>
             </a:r>
-            <a:endParaRPr lang="ja-JP" sz="1100" dirty="0"/>
+            <a:endParaRPr lang="ja-JP" sz="1050" dirty="0"/>
           </a:p>
           <a:p>
             <a:pPr algn="ctr" indent="0" marL="0">
               <a:buNone/>
             </a:pPr>
             <a:r>
-              <a:rPr lang="ja-JP" altLang="en-US" sz="1100" dirty="0">
+              <a:rPr lang="ja-JP" altLang="en-US" sz="1050" dirty="0">
                 <a:solidFill>
                   <a:srgbClr val="404040"/>
                 </a:solidFill>
@@ -2362,7 +2362,7 @@
               </a:rPr>
               <a:t>イド</a:t>
             </a:r>
-            <a:endParaRPr lang="ja-JP" sz="1100" dirty="0"/>
+            <a:endParaRPr lang="ja-JP" sz="1050" dirty="0"/>
           </a:p>
         </p:txBody>
       </p:sp>
@@ -2379,7 +2379,7 @@
           </a:xfrm>
           <a:prstGeom prst="roundRect">
             <a:avLst>
-              <a:gd name="adj" fmla="val 15625"/>
+              <a:gd name="adj" fmla="val 7813"/>
             </a:avLst>
           </a:prstGeom>
           <a:solidFill>
@@ -2395,7 +2395,7 @@
               <a:buNone/>
             </a:pPr>
             <a:r>
-              <a:rPr lang="ja-JP" altLang="en-US" sz="1100" dirty="0">
+              <a:rPr lang="ja-JP" altLang="en-US" sz="1050" dirty="0">
                 <a:solidFill>
                   <a:srgbClr val="404040"/>
                 </a:solidFill>
@@ -2405,7 +2405,7 @@
               </a:rPr>
               <a:t>まとめ</a:t>
             </a:r>
-            <a:endParaRPr lang="ja-JP" sz="1100" dirty="0"/>
+            <a:endParaRPr lang="ja-JP" sz="1050" dirty="0"/>
           </a:p>
         </p:txBody>
       </p:sp>
@@ -2860,7 +2860,7 @@
           </a:xfrm>
           <a:prstGeom prst="roundRect">
             <a:avLst>
-              <a:gd name="adj" fmla="val 15625"/>
+              <a:gd name="adj" fmla="val 7813"/>
             </a:avLst>
           </a:prstGeom>
           <a:solidFill>
@@ -2876,7 +2876,7 @@
               <a:buNone/>
             </a:pPr>
             <a:r>
-              <a:rPr lang="ja-JP" altLang="en-US" sz="1100" b="1" dirty="0">
+              <a:rPr lang="ja-JP" altLang="en-US" sz="1050" b="1" dirty="0">
                 <a:solidFill>
                   <a:srgbClr val="FFFFFF"/>
                 </a:solidFill>
@@ -2886,14 +2886,14 @@
               </a:rPr>
               <a:t>予防的</a:t>
             </a:r>
-            <a:endParaRPr lang="ja-JP" sz="1100" dirty="0"/>
+            <a:endParaRPr lang="ja-JP" sz="1050" dirty="0"/>
           </a:p>
           <a:p>
             <a:pPr algn="ctr" indent="0" marL="0">
               <a:buNone/>
             </a:pPr>
             <a:r>
-              <a:rPr lang="ja-JP" altLang="en-US" sz="1100" b="1" dirty="0">
+              <a:rPr lang="ja-JP" altLang="en-US" sz="1050" b="1" dirty="0">
                 <a:solidFill>
                   <a:srgbClr val="FFFFFF"/>
                 </a:solidFill>
@@ -2903,7 +2903,7 @@
               </a:rPr>
               <a:t>抗菌薬</a:t>
             </a:r>
-            <a:endParaRPr lang="ja-JP" sz="1100" dirty="0"/>
+            <a:endParaRPr lang="ja-JP" sz="1050" dirty="0"/>
           </a:p>
         </p:txBody>
       </p:sp>
@@ -2920,7 +2920,7 @@
           </a:xfrm>
           <a:prstGeom prst="roundRect">
             <a:avLst>
-              <a:gd name="adj" fmla="val 15625"/>
+              <a:gd name="adj" fmla="val 7813"/>
             </a:avLst>
           </a:prstGeom>
           <a:solidFill>
@@ -2936,7 +2936,7 @@
               <a:buNone/>
             </a:pPr>
             <a:r>
-              <a:rPr lang="ja-JP" altLang="en-US" sz="1100" dirty="0">
+              <a:rPr lang="ja-JP" altLang="en-US" sz="1050" dirty="0">
                 <a:solidFill>
                   <a:srgbClr val="404040"/>
                 </a:solidFill>
@@ -2946,14 +2946,14 @@
               </a:rPr>
               <a:t>抗コリン</a:t>
             </a:r>
-            <a:endParaRPr lang="ja-JP" sz="1100" dirty="0"/>
+            <a:endParaRPr lang="ja-JP" sz="1050" dirty="0"/>
           </a:p>
           <a:p>
             <a:pPr algn="ctr" indent="0" marL="0">
               <a:buNone/>
             </a:pPr>
             <a:r>
-              <a:rPr lang="ja-JP" altLang="en-US" sz="1100" dirty="0">
+              <a:rPr lang="ja-JP" altLang="en-US" sz="1050" dirty="0">
                 <a:solidFill>
                   <a:srgbClr val="404040"/>
                 </a:solidFill>
@@ -2963,7 +2963,7 @@
               </a:rPr>
               <a:t>薬</a:t>
             </a:r>
-            <a:endParaRPr lang="ja-JP" sz="1100" dirty="0"/>
+            <a:endParaRPr lang="ja-JP" sz="1050" dirty="0"/>
           </a:p>
         </p:txBody>
       </p:sp>
@@ -2980,7 +2980,7 @@
           </a:xfrm>
           <a:prstGeom prst="roundRect">
             <a:avLst>
-              <a:gd name="adj" fmla="val 15625"/>
+              <a:gd name="adj" fmla="val 7813"/>
             </a:avLst>
           </a:prstGeom>
           <a:solidFill>
@@ -2996,7 +2996,7 @@
               <a:buNone/>
             </a:pPr>
             <a:r>
-              <a:rPr lang="ja-JP" altLang="en-US" sz="1100" dirty="0">
+              <a:rPr lang="ja-JP" altLang="en-US" sz="1050" dirty="0">
                 <a:solidFill>
                   <a:srgbClr val="404040"/>
                 </a:solidFill>
@@ -3006,14 +3006,14 @@
               </a:rPr>
               <a:t>ステロ</a:t>
             </a:r>
-            <a:endParaRPr lang="ja-JP" sz="1100" dirty="0"/>
+            <a:endParaRPr lang="ja-JP" sz="1050" dirty="0"/>
           </a:p>
           <a:p>
             <a:pPr algn="ctr" indent="0" marL="0">
               <a:buNone/>
             </a:pPr>
             <a:r>
-              <a:rPr lang="ja-JP" altLang="en-US" sz="1100" dirty="0">
+              <a:rPr lang="ja-JP" altLang="en-US" sz="1050" dirty="0">
                 <a:solidFill>
                   <a:srgbClr val="404040"/>
                 </a:solidFill>
@@ -3023,7 +3023,7 @@
               </a:rPr>
               <a:t>イド</a:t>
             </a:r>
-            <a:endParaRPr lang="ja-JP" sz="1100" dirty="0"/>
+            <a:endParaRPr lang="ja-JP" sz="1050" dirty="0"/>
           </a:p>
         </p:txBody>
       </p:sp>
@@ -3040,7 +3040,7 @@
           </a:xfrm>
           <a:prstGeom prst="roundRect">
             <a:avLst>
-              <a:gd name="adj" fmla="val 15625"/>
+              <a:gd name="adj" fmla="val 7813"/>
             </a:avLst>
           </a:prstGeom>
           <a:solidFill>
@@ -3056,7 +3056,7 @@
               <a:buNone/>
             </a:pPr>
             <a:r>
-              <a:rPr lang="ja-JP" altLang="en-US" sz="1100" dirty="0">
+              <a:rPr lang="ja-JP" altLang="en-US" sz="1050" dirty="0">
                 <a:solidFill>
                   <a:srgbClr val="404040"/>
                 </a:solidFill>
@@ -3066,7 +3066,7 @@
               </a:rPr>
               <a:t>まとめ</a:t>
             </a:r>
-            <a:endParaRPr lang="ja-JP" sz="1100" dirty="0"/>
+            <a:endParaRPr lang="ja-JP" sz="1050" dirty="0"/>
           </a:p>
         </p:txBody>
       </p:sp>
@@ -3174,11 +3174,11 @@
         <p:spPr>
           <a:xfrm>
             <a:off x="502920" y="1691640"/>
-            <a:ext cx="3109874" cy="3840480"/>
+            <a:ext cx="3105302" cy="4160520"/>
           </a:xfrm>
           <a:prstGeom prst="roundRect">
             <a:avLst>
-              <a:gd name="adj" fmla="val 2352"/>
+              <a:gd name="adj" fmla="val 2356"/>
             </a:avLst>
           </a:prstGeom>
           <a:solidFill>
@@ -3195,8 +3195,8 @@
         </p:nvSpPr>
         <p:spPr>
           <a:xfrm>
-            <a:off x="640080" y="1828800"/>
-            <a:ext cx="2835554" cy="914400"/>
+            <a:off x="685800" y="1828800"/>
+            <a:ext cx="2739542" cy="914400"/>
           </a:xfrm>
           <a:prstGeom prst="rect">
             <a:avLst/>
@@ -3251,8 +3251,8 @@
         </p:nvSpPr>
         <p:spPr>
           <a:xfrm>
-            <a:off x="640080" y="2852928"/>
-            <a:ext cx="2835554" cy="841248"/>
+            <a:off x="685800" y="2852928"/>
+            <a:ext cx="2739542" cy="841248"/>
           </a:xfrm>
           <a:prstGeom prst="rect">
             <a:avLst/>
@@ -3307,8 +3307,8 @@
         </p:nvSpPr>
         <p:spPr>
           <a:xfrm>
-            <a:off x="640080" y="3931920"/>
-            <a:ext cx="2835554" cy="420624"/>
+            <a:off x="685800" y="3858768"/>
+            <a:ext cx="2739542" cy="420624"/>
           </a:xfrm>
           <a:prstGeom prst="rect">
             <a:avLst/>
@@ -3346,8 +3346,8 @@
         </p:nvSpPr>
         <p:spPr>
           <a:xfrm>
-            <a:off x="640080" y="4590288"/>
-            <a:ext cx="2835554" cy="420624"/>
+            <a:off x="685800" y="4443984"/>
+            <a:ext cx="2739542" cy="841248"/>
           </a:xfrm>
           <a:prstGeom prst="rect">
             <a:avLst/>
@@ -3371,7 +3371,24 @@
                 <a:ea typeface="メイリオ" pitchFamily="34" charset="-122"/>
                 <a:cs typeface="メイリオ" pitchFamily="34" charset="-120"/>
               </a:rPr>
-              <a:t>腎機能で間隔を調節</a:t>
+              <a:t>腎機能で</a:t>
+            </a:r>
+            <a:endParaRPr lang="ja-JP" sz="2200" dirty="0"/>
+          </a:p>
+          <a:p>
+            <a:pPr algn="l" indent="0" marL="0">
+              <a:buNone/>
+            </a:pPr>
+            <a:r>
+              <a:rPr lang="ja-JP" altLang="en-US" sz="2200" dirty="0">
+                <a:solidFill>
+                  <a:srgbClr val="262626"/>
+                </a:solidFill>
+                <a:latin typeface="メイリオ" pitchFamily="34" charset="0"/>
+                <a:ea typeface="メイリオ" pitchFamily="34" charset="-122"/>
+                <a:cs typeface="メイリオ" pitchFamily="34" charset="-120"/>
+              </a:rPr>
+              <a:t>間隔を調節</a:t>
             </a:r>
             <a:endParaRPr lang="ja-JP" sz="2200" dirty="0"/>
           </a:p>
@@ -3385,12 +3402,12 @@
         </p:nvSpPr>
         <p:spPr>
           <a:xfrm>
-            <a:off x="3832250" y="1691640"/>
-            <a:ext cx="3585362" cy="3840480"/>
+            <a:off x="3827678" y="1691640"/>
+            <a:ext cx="3504895" cy="4160520"/>
           </a:xfrm>
           <a:prstGeom prst="roundRect">
             <a:avLst>
-              <a:gd name="adj" fmla="val 2040"/>
+              <a:gd name="adj" fmla="val 2087"/>
             </a:avLst>
           </a:prstGeom>
           <a:solidFill>
@@ -3407,8 +3424,8 @@
         </p:nvSpPr>
         <p:spPr>
           <a:xfrm>
-            <a:off x="3969410" y="1828800"/>
-            <a:ext cx="3311042" cy="457200"/>
+            <a:off x="4010558" y="1828800"/>
+            <a:ext cx="3139135" cy="457200"/>
           </a:xfrm>
           <a:prstGeom prst="rect">
             <a:avLst/>
@@ -3426,7 +3443,7 @@
             <a:r>
               <a:rPr lang="ja-JP" altLang="en-US" sz="2400" b="1" dirty="0">
                 <a:solidFill>
-                  <a:srgbClr val="00A8AA"/>
+                  <a:srgbClr val="D55E00"/>
                 </a:solidFill>
                 <a:latin typeface="メイリオ" pitchFamily="34" charset="0"/>
                 <a:ea typeface="メイリオ" pitchFamily="34" charset="-122"/>
@@ -3446,8 +3463,8 @@
         </p:nvSpPr>
         <p:spPr>
           <a:xfrm>
-            <a:off x="3969410" y="2395728"/>
-            <a:ext cx="3311042" cy="841248"/>
+            <a:off x="4010558" y="2852928"/>
+            <a:ext cx="3139135" cy="841248"/>
           </a:xfrm>
           <a:prstGeom prst="rect">
             <a:avLst/>
@@ -3471,7 +3488,7 @@
                 <a:ea typeface="メイリオ" pitchFamily="34" charset="-122"/>
                 <a:cs typeface="メイリオ" pitchFamily="34" charset="-120"/>
               </a:rPr>
-              <a:t>長い手術では</a:t>
+              <a:t>長い手術では半減期の</a:t>
             </a:r>
             <a:endParaRPr lang="ja-JP" sz="2200" dirty="0"/>
           </a:p>
@@ -3488,7 +3505,7 @@
                 <a:ea typeface="メイリオ" pitchFamily="34" charset="-122"/>
                 <a:cs typeface="メイリオ" pitchFamily="34" charset="-120"/>
               </a:rPr>
-              <a:t>半減期の約 2 倍ごと</a:t>
+              <a:t>約 2 倍ごと</a:t>
             </a:r>
             <a:endParaRPr lang="ja-JP" sz="2200" dirty="0"/>
           </a:p>
@@ -3502,8 +3519,8 @@
         </p:nvSpPr>
         <p:spPr>
           <a:xfrm>
-            <a:off x="3969410" y="3474720"/>
-            <a:ext cx="3311042" cy="841248"/>
+            <a:off x="4010558" y="3858768"/>
+            <a:ext cx="3139135" cy="841248"/>
           </a:xfrm>
           <a:prstGeom prst="rect">
             <a:avLst/>
@@ -3558,8 +3575,8 @@
         </p:nvSpPr>
         <p:spPr>
           <a:xfrm>
-            <a:off x="3969410" y="4553712"/>
-            <a:ext cx="3311042" cy="841248"/>
+            <a:off x="4010558" y="4864608"/>
+            <a:ext cx="3139135" cy="841248"/>
           </a:xfrm>
           <a:prstGeom prst="rect">
             <a:avLst/>
@@ -3583,7 +3600,7 @@
                 <a:ea typeface="メイリオ" pitchFamily="34" charset="-122"/>
                 <a:cs typeface="メイリオ" pitchFamily="34" charset="-120"/>
               </a:rPr>
-              <a:t>大量出血</a:t>
+              <a:t>大量出血（1,500 mL</a:t>
             </a:r>
             <a:endParaRPr lang="ja-JP" sz="2200" dirty="0"/>
           </a:p>
@@ -3600,7 +3617,7 @@
                 <a:ea typeface="メイリオ" pitchFamily="34" charset="-122"/>
                 <a:cs typeface="メイリオ" pitchFamily="34" charset="-120"/>
               </a:rPr>
-              <a:t>（1,500 mL 以上）でも</a:t>
+              <a:t>以上）でも</a:t>
             </a:r>
             <a:endParaRPr lang="ja-JP" sz="2200" dirty="0"/>
           </a:p>
@@ -3614,12 +3631,12 @@
         </p:nvSpPr>
         <p:spPr>
           <a:xfrm>
-            <a:off x="7637069" y="1691640"/>
-            <a:ext cx="4048963" cy="3840480"/>
+            <a:off x="7552030" y="1691640"/>
+            <a:ext cx="4133088" cy="4160520"/>
           </a:xfrm>
           <a:prstGeom prst="roundRect">
             <a:avLst>
-              <a:gd name="adj" fmla="val 1905"/>
+              <a:gd name="adj" fmla="val 1770"/>
             </a:avLst>
           </a:prstGeom>
           <a:solidFill>
@@ -3636,8 +3653,8 @@
         </p:nvSpPr>
         <p:spPr>
           <a:xfrm>
-            <a:off x="7774229" y="1828800"/>
-            <a:ext cx="3774643" cy="457200"/>
+            <a:off x="7734910" y="1828800"/>
+            <a:ext cx="3767328" cy="457200"/>
           </a:xfrm>
           <a:prstGeom prst="rect">
             <a:avLst/>
@@ -3655,7 +3672,7 @@
             <a:r>
               <a:rPr lang="ja-JP" altLang="en-US" sz="2400" b="1" dirty="0">
                 <a:solidFill>
-                  <a:srgbClr val="D55E00"/>
+                  <a:srgbClr val="C00000"/>
                 </a:solidFill>
                 <a:latin typeface="メイリオ" pitchFamily="34" charset="0"/>
                 <a:ea typeface="メイリオ" pitchFamily="34" charset="-122"/>
@@ -3675,8 +3692,8 @@
         </p:nvSpPr>
         <p:spPr>
           <a:xfrm>
-            <a:off x="7774229" y="2395728"/>
-            <a:ext cx="3774643" cy="1783080"/>
+            <a:off x="7734910" y="2852928"/>
+            <a:ext cx="3767328" cy="1783080"/>
           </a:xfrm>
           <a:prstGeom prst="rect">
             <a:avLst/>
@@ -3765,8 +3782,8 @@
         </p:nvSpPr>
         <p:spPr>
           <a:xfrm>
-            <a:off x="7774229" y="4416552"/>
-            <a:ext cx="3774643" cy="841248"/>
+            <a:off x="7734910" y="4800600"/>
+            <a:ext cx="3767328" cy="841248"/>
           </a:xfrm>
           <a:prstGeom prst="rect">
             <a:avLst/>
@@ -3922,7 +3939,7 @@
           </a:xfrm>
           <a:prstGeom prst="roundRect">
             <a:avLst>
-              <a:gd name="adj" fmla="val 15625"/>
+              <a:gd name="adj" fmla="val 7813"/>
             </a:avLst>
           </a:prstGeom>
           <a:solidFill>
@@ -3938,7 +3955,7 @@
               <a:buNone/>
             </a:pPr>
             <a:r>
-              <a:rPr lang="ja-JP" altLang="en-US" sz="1100" b="1" dirty="0">
+              <a:rPr lang="ja-JP" altLang="en-US" sz="1050" b="1" dirty="0">
                 <a:solidFill>
                   <a:srgbClr val="FFFFFF"/>
                 </a:solidFill>
@@ -3948,14 +3965,14 @@
               </a:rPr>
               <a:t>予防的</a:t>
             </a:r>
-            <a:endParaRPr lang="ja-JP" sz="1100" dirty="0"/>
+            <a:endParaRPr lang="ja-JP" sz="1050" dirty="0"/>
           </a:p>
           <a:p>
             <a:pPr algn="ctr" indent="0" marL="0">
               <a:buNone/>
             </a:pPr>
             <a:r>
-              <a:rPr lang="ja-JP" altLang="en-US" sz="1100" b="1" dirty="0">
+              <a:rPr lang="ja-JP" altLang="en-US" sz="1050" b="1" dirty="0">
                 <a:solidFill>
                   <a:srgbClr val="FFFFFF"/>
                 </a:solidFill>
@@ -3965,7 +3982,7 @@
               </a:rPr>
               <a:t>抗菌薬</a:t>
             </a:r>
-            <a:endParaRPr lang="ja-JP" sz="1100" dirty="0"/>
+            <a:endParaRPr lang="ja-JP" sz="1050" dirty="0"/>
           </a:p>
         </p:txBody>
       </p:sp>
@@ -3982,7 +3999,7 @@
           </a:xfrm>
           <a:prstGeom prst="roundRect">
             <a:avLst>
-              <a:gd name="adj" fmla="val 15625"/>
+              <a:gd name="adj" fmla="val 7813"/>
             </a:avLst>
           </a:prstGeom>
           <a:solidFill>
@@ -3998,7 +4015,7 @@
               <a:buNone/>
             </a:pPr>
             <a:r>
-              <a:rPr lang="ja-JP" altLang="en-US" sz="1100" dirty="0">
+              <a:rPr lang="ja-JP" altLang="en-US" sz="1050" dirty="0">
                 <a:solidFill>
                   <a:srgbClr val="404040"/>
                 </a:solidFill>
@@ -4008,14 +4025,14 @@
               </a:rPr>
               <a:t>抗コリン</a:t>
             </a:r>
-            <a:endParaRPr lang="ja-JP" sz="1100" dirty="0"/>
+            <a:endParaRPr lang="ja-JP" sz="1050" dirty="0"/>
           </a:p>
           <a:p>
             <a:pPr algn="ctr" indent="0" marL="0">
               <a:buNone/>
             </a:pPr>
             <a:r>
-              <a:rPr lang="ja-JP" altLang="en-US" sz="1100" dirty="0">
+              <a:rPr lang="ja-JP" altLang="en-US" sz="1050" dirty="0">
                 <a:solidFill>
                   <a:srgbClr val="404040"/>
                 </a:solidFill>
@@ -4025,7 +4042,7 @@
               </a:rPr>
               <a:t>薬</a:t>
             </a:r>
-            <a:endParaRPr lang="ja-JP" sz="1100" dirty="0"/>
+            <a:endParaRPr lang="ja-JP" sz="1050" dirty="0"/>
           </a:p>
         </p:txBody>
       </p:sp>
@@ -4042,7 +4059,7 @@
           </a:xfrm>
           <a:prstGeom prst="roundRect">
             <a:avLst>
-              <a:gd name="adj" fmla="val 15625"/>
+              <a:gd name="adj" fmla="val 7813"/>
             </a:avLst>
           </a:prstGeom>
           <a:solidFill>
@@ -4058,7 +4075,7 @@
               <a:buNone/>
             </a:pPr>
             <a:r>
-              <a:rPr lang="ja-JP" altLang="en-US" sz="1100" dirty="0">
+              <a:rPr lang="ja-JP" altLang="en-US" sz="1050" dirty="0">
                 <a:solidFill>
                   <a:srgbClr val="404040"/>
                 </a:solidFill>
@@ -4068,14 +4085,14 @@
               </a:rPr>
               <a:t>ステロ</a:t>
             </a:r>
-            <a:endParaRPr lang="ja-JP" sz="1100" dirty="0"/>
+            <a:endParaRPr lang="ja-JP" sz="1050" dirty="0"/>
           </a:p>
           <a:p>
             <a:pPr algn="ctr" indent="0" marL="0">
               <a:buNone/>
             </a:pPr>
             <a:r>
-              <a:rPr lang="ja-JP" altLang="en-US" sz="1100" dirty="0">
+              <a:rPr lang="ja-JP" altLang="en-US" sz="1050" dirty="0">
                 <a:solidFill>
                   <a:srgbClr val="404040"/>
                 </a:solidFill>
@@ -4085,7 +4102,7 @@
               </a:rPr>
               <a:t>イド</a:t>
             </a:r>
-            <a:endParaRPr lang="ja-JP" sz="1100" dirty="0"/>
+            <a:endParaRPr lang="ja-JP" sz="1050" dirty="0"/>
           </a:p>
         </p:txBody>
       </p:sp>
@@ -4102,7 +4119,7 @@
           </a:xfrm>
           <a:prstGeom prst="roundRect">
             <a:avLst>
-              <a:gd name="adj" fmla="val 15625"/>
+              <a:gd name="adj" fmla="val 7813"/>
             </a:avLst>
           </a:prstGeom>
           <a:solidFill>
@@ -4118,7 +4135,7 @@
               <a:buNone/>
             </a:pPr>
             <a:r>
-              <a:rPr lang="ja-JP" altLang="en-US" sz="1100" dirty="0">
+              <a:rPr lang="ja-JP" altLang="en-US" sz="1050" dirty="0">
                 <a:solidFill>
                   <a:srgbClr val="404040"/>
                 </a:solidFill>
@@ -4128,7 +4145,7 @@
               </a:rPr>
               <a:t>まとめ</a:t>
             </a:r>
-            <a:endParaRPr lang="ja-JP" sz="1100" dirty="0"/>
+            <a:endParaRPr lang="ja-JP" sz="1050" dirty="0"/>
           </a:p>
         </p:txBody>
       </p:sp>
@@ -4385,8 +4402,8 @@
         </p:nvSpPr>
         <p:spPr>
           <a:xfrm>
-            <a:off x="1600200" y="4727448"/>
-            <a:ext cx="8988552" cy="868680"/>
+            <a:off x="1051560" y="4727448"/>
+            <a:ext cx="10085832" cy="868680"/>
           </a:xfrm>
           <a:prstGeom prst="roundRect">
             <a:avLst>
@@ -4544,7 +4561,7 @@
           </a:xfrm>
           <a:prstGeom prst="roundRect">
             <a:avLst>
-              <a:gd name="adj" fmla="val 15625"/>
+              <a:gd name="adj" fmla="val 7813"/>
             </a:avLst>
           </a:prstGeom>
           <a:solidFill>
@@ -4560,7 +4577,7 @@
               <a:buNone/>
             </a:pPr>
             <a:r>
-              <a:rPr lang="ja-JP" altLang="en-US" sz="1100" dirty="0">
+              <a:rPr lang="ja-JP" altLang="en-US" sz="1050" dirty="0">
                 <a:solidFill>
                   <a:srgbClr val="404040"/>
                 </a:solidFill>
@@ -4570,14 +4587,14 @@
               </a:rPr>
               <a:t>予防的</a:t>
             </a:r>
-            <a:endParaRPr lang="ja-JP" sz="1100" dirty="0"/>
+            <a:endParaRPr lang="ja-JP" sz="1050" dirty="0"/>
           </a:p>
           <a:p>
             <a:pPr algn="ctr" indent="0" marL="0">
               <a:buNone/>
             </a:pPr>
             <a:r>
-              <a:rPr lang="ja-JP" altLang="en-US" sz="1100" dirty="0">
+              <a:rPr lang="ja-JP" altLang="en-US" sz="1050" dirty="0">
                 <a:solidFill>
                   <a:srgbClr val="404040"/>
                 </a:solidFill>
@@ -4587,7 +4604,7 @@
               </a:rPr>
               <a:t>抗菌薬</a:t>
             </a:r>
-            <a:endParaRPr lang="ja-JP" sz="1100" dirty="0"/>
+            <a:endParaRPr lang="ja-JP" sz="1050" dirty="0"/>
           </a:p>
         </p:txBody>
       </p:sp>
@@ -4604,7 +4621,7 @@
           </a:xfrm>
           <a:prstGeom prst="roundRect">
             <a:avLst>
-              <a:gd name="adj" fmla="val 15625"/>
+              <a:gd name="adj" fmla="val 7813"/>
             </a:avLst>
           </a:prstGeom>
           <a:solidFill>
@@ -4620,7 +4637,7 @@
               <a:buNone/>
             </a:pPr>
             <a:r>
-              <a:rPr lang="ja-JP" altLang="en-US" sz="1100" b="1" dirty="0">
+              <a:rPr lang="ja-JP" altLang="en-US" sz="1050" b="1" dirty="0">
                 <a:solidFill>
                   <a:srgbClr val="FFFFFF"/>
                 </a:solidFill>
@@ -4630,14 +4647,14 @@
               </a:rPr>
               <a:t>抗コリン</a:t>
             </a:r>
-            <a:endParaRPr lang="ja-JP" sz="1100" dirty="0"/>
+            <a:endParaRPr lang="ja-JP" sz="1050" dirty="0"/>
           </a:p>
           <a:p>
             <a:pPr algn="ctr" indent="0" marL="0">
               <a:buNone/>
             </a:pPr>
             <a:r>
-              <a:rPr lang="ja-JP" altLang="en-US" sz="1100" b="1" dirty="0">
+              <a:rPr lang="ja-JP" altLang="en-US" sz="1050" b="1" dirty="0">
                 <a:solidFill>
                   <a:srgbClr val="FFFFFF"/>
                 </a:solidFill>
@@ -4647,7 +4664,7 @@
               </a:rPr>
               <a:t>薬</a:t>
             </a:r>
-            <a:endParaRPr lang="ja-JP" sz="1100" dirty="0"/>
+            <a:endParaRPr lang="ja-JP" sz="1050" dirty="0"/>
           </a:p>
         </p:txBody>
       </p:sp>
@@ -4664,7 +4681,7 @@
           </a:xfrm>
           <a:prstGeom prst="roundRect">
             <a:avLst>
-              <a:gd name="adj" fmla="val 15625"/>
+              <a:gd name="adj" fmla="val 7813"/>
             </a:avLst>
           </a:prstGeom>
           <a:solidFill>
@@ -4680,7 +4697,7 @@
               <a:buNone/>
             </a:pPr>
             <a:r>
-              <a:rPr lang="ja-JP" altLang="en-US" sz="1100" dirty="0">
+              <a:rPr lang="ja-JP" altLang="en-US" sz="1050" dirty="0">
                 <a:solidFill>
                   <a:srgbClr val="404040"/>
                 </a:solidFill>
@@ -4690,14 +4707,14 @@
               </a:rPr>
               <a:t>ステロ</a:t>
             </a:r>
-            <a:endParaRPr lang="ja-JP" sz="1100" dirty="0"/>
+            <a:endParaRPr lang="ja-JP" sz="1050" dirty="0"/>
           </a:p>
           <a:p>
             <a:pPr algn="ctr" indent="0" marL="0">
               <a:buNone/>
             </a:pPr>
             <a:r>
-              <a:rPr lang="ja-JP" altLang="en-US" sz="1100" dirty="0">
+              <a:rPr lang="ja-JP" altLang="en-US" sz="1050" dirty="0">
                 <a:solidFill>
                   <a:srgbClr val="404040"/>
                 </a:solidFill>
@@ -4707,7 +4724,7 @@
               </a:rPr>
               <a:t>イド</a:t>
             </a:r>
-            <a:endParaRPr lang="ja-JP" sz="1100" dirty="0"/>
+            <a:endParaRPr lang="ja-JP" sz="1050" dirty="0"/>
           </a:p>
         </p:txBody>
       </p:sp>
@@ -4724,7 +4741,7 @@
           </a:xfrm>
           <a:prstGeom prst="roundRect">
             <a:avLst>
-              <a:gd name="adj" fmla="val 15625"/>
+              <a:gd name="adj" fmla="val 7813"/>
             </a:avLst>
           </a:prstGeom>
           <a:solidFill>
@@ -4740,7 +4757,7 @@
               <a:buNone/>
             </a:pPr>
             <a:r>
-              <a:rPr lang="ja-JP" altLang="en-US" sz="1100" dirty="0">
+              <a:rPr lang="ja-JP" altLang="en-US" sz="1050" dirty="0">
                 <a:solidFill>
                   <a:srgbClr val="404040"/>
                 </a:solidFill>
@@ -4750,7 +4767,7 @@
               </a:rPr>
               <a:t>まとめ</a:t>
             </a:r>
-            <a:endParaRPr lang="ja-JP" sz="1100" dirty="0"/>
+            <a:endParaRPr lang="ja-JP" sz="1050" dirty="0"/>
           </a:p>
         </p:txBody>
       </p:sp>
@@ -4841,11 +4858,11 @@
         <p:spPr>
           <a:xfrm>
             <a:off x="502920" y="1691640"/>
-            <a:ext cx="3930091" cy="4480560"/>
+            <a:ext cx="4079138" cy="4480560"/>
           </a:xfrm>
           <a:prstGeom prst="roundRect">
             <a:avLst>
-              <a:gd name="adj" fmla="val 1861"/>
+              <a:gd name="adj" fmla="val 1793"/>
             </a:avLst>
           </a:prstGeom>
           <a:solidFill>
@@ -4862,8 +4879,8 @@
         </p:nvSpPr>
         <p:spPr>
           <a:xfrm>
-            <a:off x="612648" y="1801368"/>
-            <a:ext cx="3710635" cy="457200"/>
+            <a:off x="685800" y="1828800"/>
+            <a:ext cx="3713378" cy="457200"/>
           </a:xfrm>
           <a:prstGeom prst="rect">
             <a:avLst/>
@@ -4901,8 +4918,8 @@
         </p:nvSpPr>
         <p:spPr>
           <a:xfrm>
-            <a:off x="612648" y="2331720"/>
-            <a:ext cx="3710635" cy="1307592"/>
+            <a:off x="685800" y="2377440"/>
+            <a:ext cx="3713378" cy="1307592"/>
           </a:xfrm>
           <a:prstGeom prst="rect">
             <a:avLst/>
@@ -4974,8 +4991,8 @@
         </p:nvSpPr>
         <p:spPr>
           <a:xfrm>
-            <a:off x="612648" y="3749040"/>
-            <a:ext cx="3710635" cy="1307592"/>
+            <a:off x="685800" y="3776472"/>
+            <a:ext cx="3713378" cy="1307592"/>
           </a:xfrm>
           <a:prstGeom prst="rect">
             <a:avLst/>
@@ -5047,8 +5064,8 @@
         </p:nvSpPr>
         <p:spPr>
           <a:xfrm>
-            <a:off x="612648" y="5166360"/>
-            <a:ext cx="3710635" cy="841248"/>
+            <a:off x="685800" y="5175504"/>
+            <a:ext cx="3713378" cy="841248"/>
           </a:xfrm>
           <a:prstGeom prst="rect">
             <a:avLst/>
@@ -5103,12 +5120,12 @@
         </p:nvSpPr>
         <p:spPr>
           <a:xfrm>
-            <a:off x="4652467" y="1691640"/>
-            <a:ext cx="3140964" cy="4480560"/>
+            <a:off x="4801514" y="1691640"/>
+            <a:ext cx="2852014" cy="4480560"/>
           </a:xfrm>
           <a:prstGeom prst="roundRect">
             <a:avLst>
-              <a:gd name="adj" fmla="val 2329"/>
+              <a:gd name="adj" fmla="val 2565"/>
             </a:avLst>
           </a:prstGeom>
           <a:solidFill>
@@ -5125,8 +5142,8 @@
         </p:nvSpPr>
         <p:spPr>
           <a:xfrm>
-            <a:off x="4762195" y="1801368"/>
-            <a:ext cx="2921508" cy="457200"/>
+            <a:off x="4984394" y="1828800"/>
+            <a:ext cx="2486254" cy="457200"/>
           </a:xfrm>
           <a:prstGeom prst="rect">
             <a:avLst/>
@@ -5144,7 +5161,7 @@
             <a:r>
               <a:rPr lang="ja-JP" altLang="en-US" sz="2400" b="1" dirty="0">
                 <a:solidFill>
-                  <a:srgbClr val="00A8AA"/>
+                  <a:srgbClr val="D55E00"/>
                 </a:solidFill>
                 <a:latin typeface="メイリオ" pitchFamily="34" charset="0"/>
                 <a:ea typeface="メイリオ" pitchFamily="34" charset="-122"/>
@@ -5164,8 +5181,8 @@
         </p:nvSpPr>
         <p:spPr>
           <a:xfrm>
-            <a:off x="4762195" y="2331720"/>
-            <a:ext cx="2921508" cy="841248"/>
+            <a:off x="4984394" y="2377440"/>
+            <a:ext cx="2486254" cy="841248"/>
           </a:xfrm>
           <a:prstGeom prst="rect">
             <a:avLst/>
@@ -5189,7 +5206,7 @@
                 <a:ea typeface="メイリオ" pitchFamily="34" charset="-122"/>
                 <a:cs typeface="メイリオ" pitchFamily="34" charset="-120"/>
               </a:rPr>
-              <a:t>ムスカリン受容体の</a:t>
+              <a:t>ムスカリン</a:t>
             </a:r>
             <a:endParaRPr lang="ja-JP" sz="2200" dirty="0"/>
           </a:p>
@@ -5206,7 +5223,7 @@
                 <a:ea typeface="メイリオ" pitchFamily="34" charset="-122"/>
                 <a:cs typeface="メイリオ" pitchFamily="34" charset="-120"/>
               </a:rPr>
-              <a:t>遮断</a:t>
+              <a:t>受容体の遮断</a:t>
             </a:r>
             <a:endParaRPr lang="ja-JP" sz="2200" dirty="0"/>
           </a:p>
@@ -5220,8 +5237,8 @@
         </p:nvSpPr>
         <p:spPr>
           <a:xfrm>
-            <a:off x="4762195" y="3282696"/>
-            <a:ext cx="2921508" cy="841248"/>
+            <a:off x="4984394" y="3310128"/>
+            <a:ext cx="2486254" cy="1307592"/>
           </a:xfrm>
           <a:prstGeom prst="rect">
             <a:avLst/>
@@ -5245,7 +5262,24 @@
                 <a:ea typeface="メイリオ" pitchFamily="34" charset="-122"/>
                 <a:cs typeface="メイリオ" pitchFamily="34" charset="-120"/>
               </a:rPr>
-              <a:t>心拍数↑、分泌↓、</a:t>
+              <a:t>心拍数↑、</a:t>
+            </a:r>
+            <a:endParaRPr lang="ja-JP" sz="2200" dirty="0"/>
+          </a:p>
+          <a:p>
+            <a:pPr algn="l" indent="0" marL="0">
+              <a:buNone/>
+            </a:pPr>
+            <a:r>
+              <a:rPr lang="ja-JP" altLang="en-US" sz="2200" dirty="0">
+                <a:solidFill>
+                  <a:srgbClr val="262626"/>
+                </a:solidFill>
+                <a:latin typeface="メイリオ" pitchFamily="34" charset="0"/>
+                <a:ea typeface="メイリオ" pitchFamily="34" charset="-122"/>
+                <a:cs typeface="メイリオ" pitchFamily="34" charset="-120"/>
+              </a:rPr>
+              <a:t>分泌↓、</a:t>
             </a:r>
             <a:endParaRPr lang="ja-JP" sz="2200" dirty="0"/>
           </a:p>
@@ -5276,8 +5310,8 @@
         </p:nvSpPr>
         <p:spPr>
           <a:xfrm>
-            <a:off x="4762195" y="4233672"/>
-            <a:ext cx="2921508" cy="841248"/>
+            <a:off x="4984394" y="4709160"/>
+            <a:ext cx="2486254" cy="841248"/>
           </a:xfrm>
           <a:prstGeom prst="rect">
             <a:avLst/>
@@ -5332,12 +5366,12 @@
         </p:nvSpPr>
         <p:spPr>
           <a:xfrm>
-            <a:off x="8012887" y="1691640"/>
-            <a:ext cx="3673145" cy="4480560"/>
+            <a:off x="7872984" y="1691640"/>
+            <a:ext cx="3812134" cy="4480560"/>
           </a:xfrm>
           <a:prstGeom prst="roundRect">
             <a:avLst>
-              <a:gd name="adj" fmla="val 1992"/>
+              <a:gd name="adj" fmla="val 1919"/>
             </a:avLst>
           </a:prstGeom>
           <a:solidFill>
@@ -5354,8 +5388,8 @@
         </p:nvSpPr>
         <p:spPr>
           <a:xfrm>
-            <a:off x="8122615" y="1801368"/>
-            <a:ext cx="3453689" cy="457200"/>
+            <a:off x="8055864" y="1828800"/>
+            <a:ext cx="3446374" cy="457200"/>
           </a:xfrm>
           <a:prstGeom prst="rect">
             <a:avLst/>
@@ -5393,8 +5427,8 @@
         </p:nvSpPr>
         <p:spPr>
           <a:xfrm>
-            <a:off x="8122615" y="2331720"/>
-            <a:ext cx="3453689" cy="841248"/>
+            <a:off x="8055864" y="2377440"/>
+            <a:ext cx="3446374" cy="841248"/>
           </a:xfrm>
           <a:prstGeom prst="rect">
             <a:avLst/>
@@ -5471,8 +5505,8 @@
         </p:nvSpPr>
         <p:spPr>
           <a:xfrm>
-            <a:off x="8122615" y="3282696"/>
-            <a:ext cx="3453689" cy="1783080"/>
+            <a:off x="8055864" y="3310128"/>
+            <a:ext cx="3446374" cy="1783080"/>
           </a:xfrm>
           <a:prstGeom prst="rect">
             <a:avLst/>
@@ -5572,8 +5606,8 @@
         </p:nvSpPr>
         <p:spPr>
           <a:xfrm>
-            <a:off x="8122615" y="5175504"/>
-            <a:ext cx="3453689" cy="841248"/>
+            <a:off x="8055864" y="5184648"/>
+            <a:ext cx="3446374" cy="841248"/>
           </a:xfrm>
           <a:prstGeom prst="rect">
             <a:avLst/>
@@ -5729,7 +5763,7 @@
           </a:xfrm>
           <a:prstGeom prst="roundRect">
             <a:avLst>
-              <a:gd name="adj" fmla="val 15625"/>
+              <a:gd name="adj" fmla="val 7813"/>
             </a:avLst>
           </a:prstGeom>
           <a:solidFill>
@@ -5745,7 +5779,7 @@
               <a:buNone/>
             </a:pPr>
             <a:r>
-              <a:rPr lang="ja-JP" altLang="en-US" sz="1100" dirty="0">
+              <a:rPr lang="ja-JP" altLang="en-US" sz="1050" dirty="0">
                 <a:solidFill>
                   <a:srgbClr val="404040"/>
                 </a:solidFill>
@@ -5755,14 +5789,14 @@
               </a:rPr>
               <a:t>予防的</a:t>
             </a:r>
-            <a:endParaRPr lang="ja-JP" sz="1100" dirty="0"/>
+            <a:endParaRPr lang="ja-JP" sz="1050" dirty="0"/>
           </a:p>
           <a:p>
             <a:pPr algn="ctr" indent="0" marL="0">
               <a:buNone/>
             </a:pPr>
             <a:r>
-              <a:rPr lang="ja-JP" altLang="en-US" sz="1100" dirty="0">
+              <a:rPr lang="ja-JP" altLang="en-US" sz="1050" dirty="0">
                 <a:solidFill>
                   <a:srgbClr val="404040"/>
                 </a:solidFill>
@@ -5772,7 +5806,7 @@
               </a:rPr>
               <a:t>抗菌薬</a:t>
             </a:r>
-            <a:endParaRPr lang="ja-JP" sz="1100" dirty="0"/>
+            <a:endParaRPr lang="ja-JP" sz="1050" dirty="0"/>
           </a:p>
         </p:txBody>
       </p:sp>
@@ -5789,7 +5823,7 @@
           </a:xfrm>
           <a:prstGeom prst="roundRect">
             <a:avLst>
-              <a:gd name="adj" fmla="val 15625"/>
+              <a:gd name="adj" fmla="val 7813"/>
             </a:avLst>
           </a:prstGeom>
           <a:solidFill>
@@ -5805,7 +5839,7 @@
               <a:buNone/>
             </a:pPr>
             <a:r>
-              <a:rPr lang="ja-JP" altLang="en-US" sz="1100" b="1" dirty="0">
+              <a:rPr lang="ja-JP" altLang="en-US" sz="1050" b="1" dirty="0">
                 <a:solidFill>
                   <a:srgbClr val="FFFFFF"/>
                 </a:solidFill>
@@ -5815,14 +5849,14 @@
               </a:rPr>
               <a:t>抗コリン</a:t>
             </a:r>
-            <a:endParaRPr lang="ja-JP" sz="1100" dirty="0"/>
+            <a:endParaRPr lang="ja-JP" sz="1050" dirty="0"/>
           </a:p>
           <a:p>
             <a:pPr algn="ctr" indent="0" marL="0">
               <a:buNone/>
             </a:pPr>
             <a:r>
-              <a:rPr lang="ja-JP" altLang="en-US" sz="1100" b="1" dirty="0">
+              <a:rPr lang="ja-JP" altLang="en-US" sz="1050" b="1" dirty="0">
                 <a:solidFill>
                   <a:srgbClr val="FFFFFF"/>
                 </a:solidFill>
@@ -5832,7 +5866,7 @@
               </a:rPr>
               <a:t>薬</a:t>
             </a:r>
-            <a:endParaRPr lang="ja-JP" sz="1100" dirty="0"/>
+            <a:endParaRPr lang="ja-JP" sz="1050" dirty="0"/>
           </a:p>
         </p:txBody>
       </p:sp>
@@ -5849,7 +5883,7 @@
           </a:xfrm>
           <a:prstGeom prst="roundRect">
             <a:avLst>
-              <a:gd name="adj" fmla="val 15625"/>
+              <a:gd name="adj" fmla="val 7813"/>
             </a:avLst>
           </a:prstGeom>
           <a:solidFill>
@@ -5865,7 +5899,7 @@
               <a:buNone/>
             </a:pPr>
             <a:r>
-              <a:rPr lang="ja-JP" altLang="en-US" sz="1100" dirty="0">
+              <a:rPr lang="ja-JP" altLang="en-US" sz="1050" dirty="0">
                 <a:solidFill>
                   <a:srgbClr val="404040"/>
                 </a:solidFill>
@@ -5875,14 +5909,14 @@
               </a:rPr>
               <a:t>ステロ</a:t>
             </a:r>
-            <a:endParaRPr lang="ja-JP" sz="1100" dirty="0"/>
+            <a:endParaRPr lang="ja-JP" sz="1050" dirty="0"/>
           </a:p>
           <a:p>
             <a:pPr algn="ctr" indent="0" marL="0">
               <a:buNone/>
             </a:pPr>
             <a:r>
-              <a:rPr lang="ja-JP" altLang="en-US" sz="1100" dirty="0">
+              <a:rPr lang="ja-JP" altLang="en-US" sz="1050" dirty="0">
                 <a:solidFill>
                   <a:srgbClr val="404040"/>
                 </a:solidFill>
@@ -5892,7 +5926,7 @@
               </a:rPr>
               <a:t>イド</a:t>
             </a:r>
-            <a:endParaRPr lang="ja-JP" sz="1100" dirty="0"/>
+            <a:endParaRPr lang="ja-JP" sz="1050" dirty="0"/>
           </a:p>
         </p:txBody>
       </p:sp>
@@ -5909,7 +5943,7 @@
           </a:xfrm>
           <a:prstGeom prst="roundRect">
             <a:avLst>
-              <a:gd name="adj" fmla="val 15625"/>
+              <a:gd name="adj" fmla="val 7813"/>
             </a:avLst>
           </a:prstGeom>
           <a:solidFill>
@@ -5925,7 +5959,7 @@
               <a:buNone/>
             </a:pPr>
             <a:r>
-              <a:rPr lang="ja-JP" altLang="en-US" sz="1100" dirty="0">
+              <a:rPr lang="ja-JP" altLang="en-US" sz="1050" dirty="0">
                 <a:solidFill>
                   <a:srgbClr val="404040"/>
                 </a:solidFill>
@@ -5935,7 +5969,7 @@
               </a:rPr>
               <a:t>まとめ</a:t>
             </a:r>
-            <a:endParaRPr lang="ja-JP" sz="1100" dirty="0"/>
+            <a:endParaRPr lang="ja-JP" sz="1050" dirty="0"/>
           </a:p>
         </p:txBody>
       </p:sp>
@@ -6043,11 +6077,11 @@
         <p:spPr>
           <a:xfrm>
             <a:off x="502920" y="1691640"/>
-            <a:ext cx="4976165" cy="3538728"/>
+            <a:ext cx="5130698" cy="4160520"/>
           </a:xfrm>
           <a:prstGeom prst="roundRect">
             <a:avLst>
-              <a:gd name="adj" fmla="val 2067"/>
+              <a:gd name="adj" fmla="val 1758"/>
             </a:avLst>
           </a:prstGeom>
           <a:solidFill>
@@ -6064,8 +6098,8 @@
         </p:nvSpPr>
         <p:spPr>
           <a:xfrm>
-            <a:off x="640080" y="1828800"/>
-            <a:ext cx="4701845" cy="457200"/>
+            <a:off x="685800" y="1828800"/>
+            <a:ext cx="4764938" cy="457200"/>
           </a:xfrm>
           <a:prstGeom prst="rect">
             <a:avLst/>
@@ -6103,8 +6137,8 @@
         </p:nvSpPr>
         <p:spPr>
           <a:xfrm>
-            <a:off x="640080" y="2432304"/>
-            <a:ext cx="4701845" cy="841248"/>
+            <a:off x="685800" y="2432304"/>
+            <a:ext cx="4764938" cy="841248"/>
           </a:xfrm>
           <a:prstGeom prst="rect">
             <a:avLst/>
@@ -6159,8 +6193,8 @@
         </p:nvSpPr>
         <p:spPr>
           <a:xfrm>
-            <a:off x="640080" y="3547872"/>
-            <a:ext cx="4701845" cy="420624"/>
+            <a:off x="685800" y="4087368"/>
+            <a:ext cx="4764938" cy="420624"/>
           </a:xfrm>
           <a:prstGeom prst="rect">
             <a:avLst/>
@@ -6198,8 +6232,8 @@
         </p:nvSpPr>
         <p:spPr>
           <a:xfrm>
-            <a:off x="640080" y="4242816"/>
-            <a:ext cx="4701845" cy="420624"/>
+            <a:off x="685800" y="5276088"/>
+            <a:ext cx="4764938" cy="420624"/>
           </a:xfrm>
           <a:prstGeom prst="rect">
             <a:avLst/>
@@ -6237,12 +6271,12 @@
         </p:nvSpPr>
         <p:spPr>
           <a:xfrm>
-            <a:off x="5771693" y="1691640"/>
-            <a:ext cx="5914339" cy="3538728"/>
+            <a:off x="5926226" y="1691640"/>
+            <a:ext cx="5758891" cy="4160520"/>
           </a:xfrm>
           <a:prstGeom prst="roundRect">
             <a:avLst>
-              <a:gd name="adj" fmla="val 2067"/>
+              <a:gd name="adj" fmla="val 1758"/>
             </a:avLst>
           </a:prstGeom>
           <a:solidFill>
@@ -6259,8 +6293,8 @@
         </p:nvSpPr>
         <p:spPr>
           <a:xfrm>
-            <a:off x="5908853" y="1828800"/>
-            <a:ext cx="5640019" cy="457200"/>
+            <a:off x="6109106" y="1828800"/>
+            <a:ext cx="5393131" cy="457200"/>
           </a:xfrm>
           <a:prstGeom prst="rect">
             <a:avLst/>
@@ -6298,8 +6332,8 @@
         </p:nvSpPr>
         <p:spPr>
           <a:xfrm>
-            <a:off x="5908853" y="2432304"/>
-            <a:ext cx="5640019" cy="841248"/>
+            <a:off x="6109106" y="2432304"/>
+            <a:ext cx="5393131" cy="1307592"/>
           </a:xfrm>
           <a:prstGeom prst="rect">
             <a:avLst/>
@@ -6323,7 +6357,24 @@
                 <a:ea typeface="メイリオ" pitchFamily="34" charset="-122"/>
                 <a:cs typeface="メイリオ" pitchFamily="34" charset="-120"/>
               </a:rPr>
-              <a:t>徐脈の原因（低酸素、麻酔薬、刺激）を</a:t>
+              <a:t>徐脈の原因</a:t>
+            </a:r>
+            <a:endParaRPr lang="ja-JP" sz="2200" dirty="0"/>
+          </a:p>
+          <a:p>
+            <a:pPr algn="l" indent="0" marL="0">
+              <a:buNone/>
+            </a:pPr>
+            <a:r>
+              <a:rPr lang="ja-JP" altLang="en-US" sz="2200" dirty="0">
+                <a:solidFill>
+                  <a:srgbClr val="262626"/>
+                </a:solidFill>
+                <a:latin typeface="メイリオ" pitchFamily="34" charset="0"/>
+                <a:ea typeface="メイリオ" pitchFamily="34" charset="-122"/>
+                <a:cs typeface="メイリオ" pitchFamily="34" charset="-120"/>
+              </a:rPr>
+              <a:t>（低酸素、麻酔薬、刺激）を</a:t>
             </a:r>
             <a:endParaRPr lang="ja-JP" sz="2200" dirty="0"/>
           </a:p>
@@ -6354,8 +6405,8 @@
         </p:nvSpPr>
         <p:spPr>
           <a:xfrm>
-            <a:off x="5908853" y="3547872"/>
-            <a:ext cx="5640019" cy="841248"/>
+            <a:off x="6109106" y="4087368"/>
+            <a:ext cx="5393131" cy="841248"/>
           </a:xfrm>
           <a:prstGeom prst="rect">
             <a:avLst/>
@@ -6410,8 +6461,8 @@
         </p:nvSpPr>
         <p:spPr>
           <a:xfrm>
-            <a:off x="5908853" y="4663440"/>
-            <a:ext cx="5640019" cy="420624"/>
+            <a:off x="6109106" y="5276088"/>
+            <a:ext cx="5393131" cy="420624"/>
           </a:xfrm>
           <a:prstGeom prst="rect">
             <a:avLst/>
@@ -6550,7 +6601,7 @@
           </a:xfrm>
           <a:prstGeom prst="roundRect">
             <a:avLst>
-              <a:gd name="adj" fmla="val 15625"/>
+              <a:gd name="adj" fmla="val 7813"/>
             </a:avLst>
           </a:prstGeom>
           <a:solidFill>
@@ -6566,7 +6617,7 @@
               <a:buNone/>
             </a:pPr>
             <a:r>
-              <a:rPr lang="ja-JP" altLang="en-US" sz="1100" dirty="0">
+              <a:rPr lang="ja-JP" altLang="en-US" sz="1050" dirty="0">
                 <a:solidFill>
                   <a:srgbClr val="404040"/>
                 </a:solidFill>
@@ -6576,14 +6627,14 @@
               </a:rPr>
               <a:t>予防的</a:t>
             </a:r>
-            <a:endParaRPr lang="ja-JP" sz="1100" dirty="0"/>
+            <a:endParaRPr lang="ja-JP" sz="1050" dirty="0"/>
           </a:p>
           <a:p>
             <a:pPr algn="ctr" indent="0" marL="0">
               <a:buNone/>
             </a:pPr>
             <a:r>
-              <a:rPr lang="ja-JP" altLang="en-US" sz="1100" dirty="0">
+              <a:rPr lang="ja-JP" altLang="en-US" sz="1050" dirty="0">
                 <a:solidFill>
                   <a:srgbClr val="404040"/>
                 </a:solidFill>
@@ -6593,7 +6644,7 @@
               </a:rPr>
               <a:t>抗菌薬</a:t>
             </a:r>
-            <a:endParaRPr lang="ja-JP" sz="1100" dirty="0"/>
+            <a:endParaRPr lang="ja-JP" sz="1050" dirty="0"/>
           </a:p>
         </p:txBody>
       </p:sp>
@@ -6610,7 +6661,7 @@
           </a:xfrm>
           <a:prstGeom prst="roundRect">
             <a:avLst>
-              <a:gd name="adj" fmla="val 15625"/>
+              <a:gd name="adj" fmla="val 7813"/>
             </a:avLst>
           </a:prstGeom>
           <a:solidFill>
@@ -6626,7 +6677,7 @@
               <a:buNone/>
             </a:pPr>
             <a:r>
-              <a:rPr lang="ja-JP" altLang="en-US" sz="1100" dirty="0">
+              <a:rPr lang="ja-JP" altLang="en-US" sz="1050" dirty="0">
                 <a:solidFill>
                   <a:srgbClr val="404040"/>
                 </a:solidFill>
@@ -6636,14 +6687,14 @@
               </a:rPr>
               <a:t>抗コリン</a:t>
             </a:r>
-            <a:endParaRPr lang="ja-JP" sz="1100" dirty="0"/>
+            <a:endParaRPr lang="ja-JP" sz="1050" dirty="0"/>
           </a:p>
           <a:p>
             <a:pPr algn="ctr" indent="0" marL="0">
               <a:buNone/>
             </a:pPr>
             <a:r>
-              <a:rPr lang="ja-JP" altLang="en-US" sz="1100" dirty="0">
+              <a:rPr lang="ja-JP" altLang="en-US" sz="1050" dirty="0">
                 <a:solidFill>
                   <a:srgbClr val="404040"/>
                 </a:solidFill>
@@ -6653,7 +6704,7 @@
               </a:rPr>
               <a:t>薬</a:t>
             </a:r>
-            <a:endParaRPr lang="ja-JP" sz="1100" dirty="0"/>
+            <a:endParaRPr lang="ja-JP" sz="1050" dirty="0"/>
           </a:p>
         </p:txBody>
       </p:sp>
@@ -6670,7 +6721,7 @@
           </a:xfrm>
           <a:prstGeom prst="roundRect">
             <a:avLst>
-              <a:gd name="adj" fmla="val 15625"/>
+              <a:gd name="adj" fmla="val 7813"/>
             </a:avLst>
           </a:prstGeom>
           <a:solidFill>
@@ -6686,7 +6737,7 @@
               <a:buNone/>
             </a:pPr>
             <a:r>
-              <a:rPr lang="ja-JP" altLang="en-US" sz="1100" b="1" dirty="0">
+              <a:rPr lang="ja-JP" altLang="en-US" sz="1050" b="1" dirty="0">
                 <a:solidFill>
                   <a:srgbClr val="FFFFFF"/>
                 </a:solidFill>
@@ -6696,14 +6747,14 @@
               </a:rPr>
               <a:t>ステロ</a:t>
             </a:r>
-            <a:endParaRPr lang="ja-JP" sz="1100" dirty="0"/>
+            <a:endParaRPr lang="ja-JP" sz="1050" dirty="0"/>
           </a:p>
           <a:p>
             <a:pPr algn="ctr" indent="0" marL="0">
               <a:buNone/>
             </a:pPr>
             <a:r>
-              <a:rPr lang="ja-JP" altLang="en-US" sz="1100" b="1" dirty="0">
+              <a:rPr lang="ja-JP" altLang="en-US" sz="1050" b="1" dirty="0">
                 <a:solidFill>
                   <a:srgbClr val="FFFFFF"/>
                 </a:solidFill>
@@ -6713,7 +6764,7 @@
               </a:rPr>
               <a:t>イド</a:t>
             </a:r>
-            <a:endParaRPr lang="ja-JP" sz="1100" dirty="0"/>
+            <a:endParaRPr lang="ja-JP" sz="1050" dirty="0"/>
           </a:p>
         </p:txBody>
       </p:sp>
@@ -6730,7 +6781,7 @@
           </a:xfrm>
           <a:prstGeom prst="roundRect">
             <a:avLst>
-              <a:gd name="adj" fmla="val 15625"/>
+              <a:gd name="adj" fmla="val 7813"/>
             </a:avLst>
           </a:prstGeom>
           <a:solidFill>
@@ -6746,7 +6797,7 @@
               <a:buNone/>
             </a:pPr>
             <a:r>
-              <a:rPr lang="ja-JP" altLang="en-US" sz="1100" dirty="0">
+              <a:rPr lang="ja-JP" altLang="en-US" sz="1050" dirty="0">
                 <a:solidFill>
                   <a:srgbClr val="404040"/>
                 </a:solidFill>
@@ -6756,7 +6807,7 @@
               </a:rPr>
               <a:t>まとめ</a:t>
             </a:r>
-            <a:endParaRPr lang="ja-JP" sz="1100" dirty="0"/>
+            <a:endParaRPr lang="ja-JP" sz="1050" dirty="0"/>
           </a:p>
         </p:txBody>
       </p:sp>
@@ -6864,11 +6915,11 @@
         <p:spPr>
           <a:xfrm>
             <a:off x="502920" y="1691640"/>
-            <a:ext cx="4288536" cy="3986784"/>
+            <a:ext cx="4140403" cy="4160520"/>
           </a:xfrm>
           <a:prstGeom prst="roundRect">
             <a:avLst>
-              <a:gd name="adj" fmla="val 1835"/>
+              <a:gd name="adj" fmla="val 1767"/>
             </a:avLst>
           </a:prstGeom>
           <a:solidFill>
@@ -6885,8 +6936,8 @@
         </p:nvSpPr>
         <p:spPr>
           <a:xfrm>
-            <a:off x="594360" y="1783080"/>
-            <a:ext cx="4105656" cy="457200"/>
+            <a:off x="685800" y="1828800"/>
+            <a:ext cx="3774643" cy="457200"/>
           </a:xfrm>
           <a:prstGeom prst="rect">
             <a:avLst/>
@@ -6924,8 +6975,8 @@
         </p:nvSpPr>
         <p:spPr>
           <a:xfrm>
-            <a:off x="594360" y="2331720"/>
-            <a:ext cx="4105656" cy="1307592"/>
+            <a:off x="685800" y="2395728"/>
+            <a:ext cx="3774643" cy="1783080"/>
           </a:xfrm>
           <a:prstGeom prst="rect">
             <a:avLst/>
@@ -6949,7 +7000,24 @@
                 <a:ea typeface="メイリオ" pitchFamily="34" charset="-122"/>
                 <a:cs typeface="メイリオ" pitchFamily="34" charset="-120"/>
               </a:rPr>
-              <a:t>デキサメタゾン 3.3〜6.6 mg</a:t>
+              <a:t>デキサメタゾン</a:t>
+            </a:r>
+            <a:endParaRPr lang="ja-JP" sz="2200" dirty="0"/>
+          </a:p>
+          <a:p>
+            <a:pPr algn="l" indent="0" marL="0">
+              <a:buNone/>
+            </a:pPr>
+            <a:r>
+              <a:rPr lang="ja-JP" altLang="en-US" sz="2200" dirty="0">
+                <a:solidFill>
+                  <a:srgbClr val="262626"/>
+                </a:solidFill>
+                <a:latin typeface="メイリオ" pitchFamily="34" charset="0"/>
+                <a:ea typeface="メイリオ" pitchFamily="34" charset="-122"/>
+                <a:cs typeface="メイリオ" pitchFamily="34" charset="-120"/>
+              </a:rPr>
+              <a:t>3.3〜6.6 mg</a:t>
             </a:r>
             <a:endParaRPr lang="ja-JP" sz="2200" dirty="0"/>
           </a:p>
@@ -6997,8 +7065,8 @@
         </p:nvSpPr>
         <p:spPr>
           <a:xfrm>
-            <a:off x="594360" y="3767328"/>
-            <a:ext cx="4105656" cy="841248"/>
+            <a:off x="685800" y="4306824"/>
+            <a:ext cx="3774643" cy="841248"/>
           </a:xfrm>
           <a:prstGeom prst="rect">
             <a:avLst/>
@@ -7053,8 +7121,8 @@
         </p:nvSpPr>
         <p:spPr>
           <a:xfrm>
-            <a:off x="594360" y="4736592"/>
-            <a:ext cx="4105656" cy="420624"/>
+            <a:off x="685800" y="5276088"/>
+            <a:ext cx="3774643" cy="420624"/>
           </a:xfrm>
           <a:prstGeom prst="rect">
             <a:avLst/>
@@ -7092,12 +7160,12 @@
         </p:nvSpPr>
         <p:spPr>
           <a:xfrm>
-            <a:off x="5010912" y="1691640"/>
-            <a:ext cx="3443630" cy="3986784"/>
+            <a:off x="4862779" y="1691640"/>
+            <a:ext cx="3406140" cy="4160520"/>
           </a:xfrm>
           <a:prstGeom prst="roundRect">
             <a:avLst>
-              <a:gd name="adj" fmla="val 2124"/>
+              <a:gd name="adj" fmla="val 2148"/>
             </a:avLst>
           </a:prstGeom>
           <a:solidFill>
@@ -7114,8 +7182,8 @@
         </p:nvSpPr>
         <p:spPr>
           <a:xfrm>
-            <a:off x="5102352" y="1783080"/>
-            <a:ext cx="3260750" cy="457200"/>
+            <a:off x="5045659" y="1828800"/>
+            <a:ext cx="3040380" cy="457200"/>
           </a:xfrm>
           <a:prstGeom prst="rect">
             <a:avLst/>
@@ -7133,7 +7201,7 @@
             <a:r>
               <a:rPr lang="ja-JP" altLang="en-US" sz="2400" b="1" dirty="0">
                 <a:solidFill>
-                  <a:srgbClr val="00A8AA"/>
+                  <a:srgbClr val="D55E00"/>
                 </a:solidFill>
                 <a:latin typeface="メイリオ" pitchFamily="34" charset="0"/>
                 <a:ea typeface="メイリオ" pitchFamily="34" charset="-122"/>
@@ -7153,8 +7221,8 @@
         </p:nvSpPr>
         <p:spPr>
           <a:xfrm>
-            <a:off x="5102352" y="2331720"/>
-            <a:ext cx="3260750" cy="841248"/>
+            <a:off x="5045659" y="2395728"/>
+            <a:ext cx="3040380" cy="841248"/>
           </a:xfrm>
           <a:prstGeom prst="rect">
             <a:avLst/>
@@ -7209,8 +7277,8 @@
         </p:nvSpPr>
         <p:spPr>
           <a:xfrm>
-            <a:off x="5102352" y="3300984"/>
-            <a:ext cx="3260750" cy="841248"/>
+            <a:off x="5045659" y="3364992"/>
+            <a:ext cx="3040380" cy="841248"/>
           </a:xfrm>
           <a:prstGeom prst="rect">
             <a:avLst/>
@@ -7276,8 +7344,8 @@
         </p:nvSpPr>
         <p:spPr>
           <a:xfrm>
-            <a:off x="5102352" y="4270248"/>
-            <a:ext cx="3260750" cy="1307592"/>
+            <a:off x="5045659" y="4334256"/>
+            <a:ext cx="3040380" cy="1307592"/>
           </a:xfrm>
           <a:prstGeom prst="rect">
             <a:avLst/>
@@ -7301,7 +7369,7 @@
                 <a:ea typeface="メイリオ" pitchFamily="34" charset="-122"/>
                 <a:cs typeface="メイリオ" pitchFamily="34" charset="-120"/>
               </a:rPr>
-              <a:t>以後 200 mg/24 時間の</a:t>
+              <a:t>以後 200 mg/24 時間</a:t>
             </a:r>
             <a:endParaRPr lang="ja-JP" sz="2200" dirty="0"/>
           </a:p>
@@ -7318,7 +7386,7 @@
                 <a:ea typeface="メイリオ" pitchFamily="34" charset="-122"/>
                 <a:cs typeface="メイリオ" pitchFamily="34" charset="-120"/>
               </a:rPr>
-              <a:t>持続（倍量を</a:t>
+              <a:t>の持続（倍量を</a:t>
             </a:r>
             <a:endParaRPr lang="ja-JP" sz="2200" dirty="0"/>
           </a:p>
@@ -7349,12 +7417,12 @@
         </p:nvSpPr>
         <p:spPr>
           <a:xfrm>
-            <a:off x="8673998" y="1691640"/>
-            <a:ext cx="3012034" cy="3986784"/>
+            <a:off x="8488375" y="1691640"/>
+            <a:ext cx="3196742" cy="4160520"/>
           </a:xfrm>
           <a:prstGeom prst="roundRect">
             <a:avLst>
-              <a:gd name="adj" fmla="val 2429"/>
+              <a:gd name="adj" fmla="val 2288"/>
             </a:avLst>
           </a:prstGeom>
           <a:solidFill>
@@ -7371,8 +7439,8 @@
         </p:nvSpPr>
         <p:spPr>
           <a:xfrm>
-            <a:off x="8765438" y="1783080"/>
-            <a:ext cx="2829154" cy="457200"/>
+            <a:off x="8671255" y="1828800"/>
+            <a:ext cx="2830982" cy="457200"/>
           </a:xfrm>
           <a:prstGeom prst="rect">
             <a:avLst/>
@@ -7390,7 +7458,7 @@
             <a:r>
               <a:rPr lang="ja-JP" altLang="en-US" sz="2400" b="1" dirty="0">
                 <a:solidFill>
-                  <a:srgbClr val="D55E00"/>
+                  <a:srgbClr val="C00000"/>
                 </a:solidFill>
                 <a:latin typeface="メイリオ" pitchFamily="34" charset="0"/>
                 <a:ea typeface="メイリオ" pitchFamily="34" charset="-122"/>
@@ -7410,8 +7478,8 @@
         </p:nvSpPr>
         <p:spPr>
           <a:xfrm>
-            <a:off x="8765438" y="2331720"/>
-            <a:ext cx="2829154" cy="841248"/>
+            <a:off x="8671255" y="2395728"/>
+            <a:ext cx="2830982" cy="841248"/>
           </a:xfrm>
           <a:prstGeom prst="rect">
             <a:avLst/>
@@ -7466,8 +7534,8 @@
         </p:nvSpPr>
         <p:spPr>
           <a:xfrm>
-            <a:off x="8765438" y="3300984"/>
-            <a:ext cx="2829154" cy="1307592"/>
+            <a:off x="8671255" y="3364992"/>
+            <a:ext cx="2830982" cy="1307592"/>
           </a:xfrm>
           <a:prstGeom prst="rect">
             <a:avLst/>
@@ -7539,8 +7607,8 @@
         </p:nvSpPr>
         <p:spPr>
           <a:xfrm>
-            <a:off x="8765438" y="4736592"/>
-            <a:ext cx="2829154" cy="420624"/>
+            <a:off x="8671255" y="4800600"/>
+            <a:ext cx="2830982" cy="420624"/>
           </a:xfrm>
           <a:prstGeom prst="rect">
             <a:avLst/>
@@ -7679,7 +7747,7 @@
           </a:xfrm>
           <a:prstGeom prst="roundRect">
             <a:avLst>
-              <a:gd name="adj" fmla="val 15625"/>
+              <a:gd name="adj" fmla="val 7813"/>
             </a:avLst>
           </a:prstGeom>
           <a:solidFill>
@@ -7695,7 +7763,7 @@
               <a:buNone/>
             </a:pPr>
             <a:r>
-              <a:rPr lang="ja-JP" altLang="en-US" sz="1100" dirty="0">
+              <a:rPr lang="ja-JP" altLang="en-US" sz="1050" dirty="0">
                 <a:solidFill>
                   <a:srgbClr val="404040"/>
                 </a:solidFill>
@@ -7705,14 +7773,14 @@
               </a:rPr>
               <a:t>予防的</a:t>
             </a:r>
-            <a:endParaRPr lang="ja-JP" sz="1100" dirty="0"/>
+            <a:endParaRPr lang="ja-JP" sz="1050" dirty="0"/>
           </a:p>
           <a:p>
             <a:pPr algn="ctr" indent="0" marL="0">
               <a:buNone/>
             </a:pPr>
             <a:r>
-              <a:rPr lang="ja-JP" altLang="en-US" sz="1100" dirty="0">
+              <a:rPr lang="ja-JP" altLang="en-US" sz="1050" dirty="0">
                 <a:solidFill>
                   <a:srgbClr val="404040"/>
                 </a:solidFill>
@@ -7722,7 +7790,7 @@
               </a:rPr>
               <a:t>抗菌薬</a:t>
             </a:r>
-            <a:endParaRPr lang="ja-JP" sz="1100" dirty="0"/>
+            <a:endParaRPr lang="ja-JP" sz="1050" dirty="0"/>
           </a:p>
         </p:txBody>
       </p:sp>
@@ -7739,7 +7807,7 @@
           </a:xfrm>
           <a:prstGeom prst="roundRect">
             <a:avLst>
-              <a:gd name="adj" fmla="val 15625"/>
+              <a:gd name="adj" fmla="val 7813"/>
             </a:avLst>
           </a:prstGeom>
           <a:solidFill>
@@ -7755,7 +7823,7 @@
               <a:buNone/>
             </a:pPr>
             <a:r>
-              <a:rPr lang="ja-JP" altLang="en-US" sz="1100" dirty="0">
+              <a:rPr lang="ja-JP" altLang="en-US" sz="1050" dirty="0">
                 <a:solidFill>
                   <a:srgbClr val="404040"/>
                 </a:solidFill>
@@ -7765,14 +7833,14 @@
               </a:rPr>
               <a:t>抗コリン</a:t>
             </a:r>
-            <a:endParaRPr lang="ja-JP" sz="1100" dirty="0"/>
+            <a:endParaRPr lang="ja-JP" sz="1050" dirty="0"/>
           </a:p>
           <a:p>
             <a:pPr algn="ctr" indent="0" marL="0">
               <a:buNone/>
             </a:pPr>
             <a:r>
-              <a:rPr lang="ja-JP" altLang="en-US" sz="1100" dirty="0">
+              <a:rPr lang="ja-JP" altLang="en-US" sz="1050" dirty="0">
                 <a:solidFill>
                   <a:srgbClr val="404040"/>
                 </a:solidFill>
@@ -7782,7 +7850,7 @@
               </a:rPr>
               <a:t>薬</a:t>
             </a:r>
-            <a:endParaRPr lang="ja-JP" sz="1100" dirty="0"/>
+            <a:endParaRPr lang="ja-JP" sz="1050" dirty="0"/>
           </a:p>
         </p:txBody>
       </p:sp>
@@ -7799,7 +7867,7 @@
           </a:xfrm>
           <a:prstGeom prst="roundRect">
             <a:avLst>
-              <a:gd name="adj" fmla="val 15625"/>
+              <a:gd name="adj" fmla="val 7813"/>
             </a:avLst>
           </a:prstGeom>
           <a:solidFill>
@@ -7815,7 +7883,7 @@
               <a:buNone/>
             </a:pPr>
             <a:r>
-              <a:rPr lang="ja-JP" altLang="en-US" sz="1100" b="1" dirty="0">
+              <a:rPr lang="ja-JP" altLang="en-US" sz="1050" b="1" dirty="0">
                 <a:solidFill>
                   <a:srgbClr val="FFFFFF"/>
                 </a:solidFill>
@@ -7825,14 +7893,14 @@
               </a:rPr>
               <a:t>ステロ</a:t>
             </a:r>
-            <a:endParaRPr lang="ja-JP" sz="1100" dirty="0"/>
+            <a:endParaRPr lang="ja-JP" sz="1050" dirty="0"/>
           </a:p>
           <a:p>
             <a:pPr algn="ctr" indent="0" marL="0">
               <a:buNone/>
             </a:pPr>
             <a:r>
-              <a:rPr lang="ja-JP" altLang="en-US" sz="1100" b="1" dirty="0">
+              <a:rPr lang="ja-JP" altLang="en-US" sz="1050" b="1" dirty="0">
                 <a:solidFill>
                   <a:srgbClr val="FFFFFF"/>
                 </a:solidFill>
@@ -7842,7 +7910,7 @@
               </a:rPr>
               <a:t>イド</a:t>
             </a:r>
-            <a:endParaRPr lang="ja-JP" sz="1100" dirty="0"/>
+            <a:endParaRPr lang="ja-JP" sz="1050" dirty="0"/>
           </a:p>
         </p:txBody>
       </p:sp>
@@ -7859,7 +7927,7 @@
           </a:xfrm>
           <a:prstGeom prst="roundRect">
             <a:avLst>
-              <a:gd name="adj" fmla="val 15625"/>
+              <a:gd name="adj" fmla="val 7813"/>
             </a:avLst>
           </a:prstGeom>
           <a:solidFill>
@@ -7875,7 +7943,7 @@
               <a:buNone/>
             </a:pPr>
             <a:r>
-              <a:rPr lang="ja-JP" altLang="en-US" sz="1100" dirty="0">
+              <a:rPr lang="ja-JP" altLang="en-US" sz="1050" dirty="0">
                 <a:solidFill>
                   <a:srgbClr val="404040"/>
                 </a:solidFill>
@@ -7885,7 +7953,7 @@
               </a:rPr>
               <a:t>まとめ</a:t>
             </a:r>
-            <a:endParaRPr lang="ja-JP" sz="1100" dirty="0"/>
+            <a:endParaRPr lang="ja-JP" sz="1050" dirty="0"/>
           </a:p>
         </p:txBody>
       </p:sp>
@@ -7992,8 +8060,8 @@
         </p:nvSpPr>
         <p:spPr>
           <a:xfrm>
-            <a:off x="502920" y="1828800"/>
-            <a:ext cx="11155680" cy="3813048"/>
+            <a:off x="502920" y="1783080"/>
+            <a:ext cx="11155680" cy="2514600"/>
           </a:xfrm>
           <a:prstGeom prst="rect">
             <a:avLst/>
@@ -8005,15 +8073,15 @@
           <a:bodyPr wrap="square" lIns="0" tIns="0" rIns="0" bIns="0" rtlCol="0" anchor="t"/>
           <a:lstStyle/>
           <a:p>
-            <a:pPr algn="l" marL="406400" indent="-406400">
+            <a:pPr algn="l" marL="381000" indent="-381000">
               <a:spcAft>
-                <a:spcPts val="2200"/>
+                <a:spcPts val="1400"/>
               </a:spcAft>
               <a:buSzPct val="100000"/>
               <a:buChar char="•"/>
             </a:pPr>
             <a:r>
-              <a:rPr lang="ja-JP" altLang="en-US" sz="2800" b="1" dirty="0">
+              <a:rPr lang="ja-JP" altLang="en-US" sz="2600" b="1" dirty="0">
                 <a:solidFill>
                   <a:srgbClr val="0072B2"/>
                 </a:solidFill>
@@ -8024,7 +8092,7 @@
               <a:t>高血糖：</a:t>
             </a:r>
             <a:r>
-              <a:rPr lang="ja-JP" altLang="en-US" sz="2800" dirty="0">
+              <a:rPr lang="ja-JP" altLang="en-US" sz="2600" dirty="0">
                 <a:solidFill>
                   <a:srgbClr val="262626"/>
                 </a:solidFill>
@@ -8034,18 +8102,18 @@
               </a:rPr>
               <a:t>糖尿病患者では術後の血糖を見る</a:t>
             </a:r>
-            <a:endParaRPr lang="ja-JP" sz="2800" dirty="0"/>
-          </a:p>
-          <a:p>
-            <a:pPr algn="l" marL="406400" indent="-406400">
+            <a:endParaRPr lang="ja-JP" sz="2600" dirty="0"/>
+          </a:p>
+          <a:p>
+            <a:pPr algn="l" marL="381000" indent="-381000">
               <a:spcAft>
-                <a:spcPts val="2200"/>
+                <a:spcPts val="1400"/>
               </a:spcAft>
               <a:buSzPct val="100000"/>
               <a:buChar char="•"/>
             </a:pPr>
             <a:r>
-              <a:rPr lang="ja-JP" altLang="en-US" sz="2800" b="1" dirty="0">
+              <a:rPr lang="ja-JP" altLang="en-US" sz="2600" b="1" dirty="0">
                 <a:solidFill>
                   <a:srgbClr val="0072B2"/>
                 </a:solidFill>
@@ -8056,7 +8124,7 @@
               <a:t>創感染：</a:t>
             </a:r>
             <a:r>
-              <a:rPr lang="ja-JP" altLang="en-US" sz="2800" dirty="0">
+              <a:rPr lang="ja-JP" altLang="en-US" sz="2600" dirty="0">
                 <a:solidFill>
                   <a:srgbClr val="262626"/>
                 </a:solidFill>
@@ -8066,39 +8134,50 @@
               </a:rPr>
               <a:t>単回投与で明らかな増加はないとされる</a:t>
             </a:r>
-            <a:endParaRPr lang="ja-JP" sz="2800" dirty="0"/>
-          </a:p>
-          <a:p>
-            <a:pPr algn="l" marL="406400" indent="-406400">
+            <a:endParaRPr lang="ja-JP" sz="2600" dirty="0"/>
+          </a:p>
+          <a:p>
+            <a:pPr algn="l" marL="381000" indent="-381000">
               <a:spcAft>
-                <a:spcPts val="2200"/>
+                <a:spcPts val="1400"/>
               </a:spcAft>
               <a:buSzPct val="100000"/>
               <a:buChar char="•"/>
             </a:pPr>
             <a:r>
-              <a:rPr lang="ja-JP" altLang="en-US" sz="2800" dirty="0">
-                <a:solidFill>
-                  <a:srgbClr val="262626"/>
-                </a:solidFill>
-                <a:latin typeface="メイリオ" pitchFamily="34" charset="0"/>
-                <a:ea typeface="メイリオ" pitchFamily="34" charset="-122"/>
-                <a:cs typeface="メイリオ" pitchFamily="34" charset="-120"/>
-              </a:rPr>
-              <a:t>急速静注で会陰部の灼熱感（デキサメタゾン）</a:t>
-            </a:r>
-            <a:endParaRPr lang="ja-JP" sz="2800" dirty="0"/>
-          </a:p>
-          <a:p>
-            <a:pPr algn="l" marL="406400" indent="-406400">
+              <a:rPr lang="ja-JP" altLang="en-US" sz="2600" b="1" dirty="0">
+                <a:solidFill>
+                  <a:srgbClr val="0072B2"/>
+                </a:solidFill>
+                <a:latin typeface="メイリオ" pitchFamily="34" charset="0"/>
+                <a:ea typeface="メイリオ" pitchFamily="34" charset="-122"/>
+                <a:cs typeface="メイリオ" pitchFamily="34" charset="-120"/>
+              </a:rPr>
+              <a:t>急速静注で</a:t>
+            </a:r>
+            <a:r>
+              <a:rPr lang="ja-JP" altLang="en-US" sz="2600" dirty="0">
+                <a:solidFill>
+                  <a:srgbClr val="262626"/>
+                </a:solidFill>
+                <a:latin typeface="メイリオ" pitchFamily="34" charset="0"/>
+                <a:ea typeface="メイリオ" pitchFamily="34" charset="-122"/>
+                <a:cs typeface="メイリオ" pitchFamily="34" charset="-120"/>
+              </a:rPr>
+              <a:t>会陰部の灼熱感（デキサメタゾン）</a:t>
+            </a:r>
+            <a:endParaRPr lang="ja-JP" sz="2600" dirty="0"/>
+          </a:p>
+          <a:p>
+            <a:pPr algn="l" marL="381000" indent="-381000">
               <a:spcAft>
-                <a:spcPts val="2200"/>
+                <a:spcPts val="1400"/>
               </a:spcAft>
               <a:buSzPct val="100000"/>
               <a:buChar char="•"/>
             </a:pPr>
             <a:r>
-              <a:rPr lang="ja-JP" altLang="en-US" sz="2800" dirty="0">
+              <a:rPr lang="ja-JP" altLang="en-US" sz="2600" dirty="0">
                 <a:solidFill>
                   <a:srgbClr val="262626"/>
                 </a:solidFill>
@@ -8109,41 +8188,67 @@
               <a:t>カバー不足は</a:t>
             </a:r>
             <a:r>
+              <a:rPr lang="ja-JP" altLang="en-US" sz="2600" b="1" dirty="0">
+                <a:solidFill>
+                  <a:srgbClr val="C00000"/>
+                </a:solidFill>
+                <a:latin typeface="メイリオ" pitchFamily="34" charset="0"/>
+                <a:ea typeface="メイリオ" pitchFamily="34" charset="-122"/>
+                <a:cs typeface="メイリオ" pitchFamily="34" charset="-120"/>
+              </a:rPr>
+              <a:t>副腎クリーゼ</a:t>
+            </a:r>
+            <a:r>
+              <a:rPr lang="ja-JP" altLang="en-US" sz="2600" dirty="0">
+                <a:solidFill>
+                  <a:srgbClr val="262626"/>
+                </a:solidFill>
+                <a:latin typeface="メイリオ" pitchFamily="34" charset="0"/>
+                <a:ea typeface="メイリオ" pitchFamily="34" charset="-122"/>
+                <a:cs typeface="メイリオ" pitchFamily="34" charset="-120"/>
+              </a:rPr>
+              <a:t>、過剰は高血糖・感染</a:t>
+            </a:r>
+            <a:endParaRPr lang="ja-JP" sz="2600" dirty="0"/>
+          </a:p>
+        </p:txBody>
+      </p:sp>
+      <p:sp>
+        <p:nvSpPr>
+          <p:cNvPr id="11" name="Text 9"/>
+          <p:cNvSpPr/>
+          <p:nvPr/>
+        </p:nvSpPr>
+        <p:spPr>
+          <a:xfrm>
+            <a:off x="1051560" y="4727448"/>
+            <a:ext cx="10085832" cy="868680"/>
+          </a:xfrm>
+          <a:prstGeom prst="roundRect">
+            <a:avLst>
+              <a:gd name="adj" fmla="val 10526"/>
+            </a:avLst>
+          </a:prstGeom>
+          <a:solidFill>
+            <a:srgbClr val="FFFFFF"/>
+          </a:solidFill>
+          <a:ln w="44450">
+            <a:solidFill>
+              <a:srgbClr val="00A8AA"/>
+            </a:solidFill>
+          </a:ln>
+        </p:spPr>
+        <p:txBody>
+          <a:bodyPr wrap="square" lIns="73152" tIns="73152" rIns="73152" bIns="73152" rtlCol="0" anchor="ctr"/>
+          <a:lstStyle/>
+          <a:p>
+            <a:pPr algn="ctr" indent="0" marL="0">
+              <a:buNone/>
+            </a:pPr>
+            <a:r>
               <a:rPr lang="ja-JP" altLang="en-US" sz="2800" b="1" dirty="0">
                 <a:solidFill>
-                  <a:srgbClr val="C00000"/>
-                </a:solidFill>
-                <a:latin typeface="メイリオ" pitchFamily="34" charset="0"/>
-                <a:ea typeface="メイリオ" pitchFamily="34" charset="-122"/>
-                <a:cs typeface="メイリオ" pitchFamily="34" charset="-120"/>
-              </a:rPr>
-              <a:t>副腎クリーゼ</a:t>
-            </a:r>
-            <a:r>
-              <a:rPr lang="ja-JP" altLang="en-US" sz="2800" dirty="0">
-                <a:solidFill>
-                  <a:srgbClr val="262626"/>
-                </a:solidFill>
-                <a:latin typeface="メイリオ" pitchFamily="34" charset="0"/>
-                <a:ea typeface="メイリオ" pitchFamily="34" charset="-122"/>
-                <a:cs typeface="メイリオ" pitchFamily="34" charset="-120"/>
-              </a:rPr>
-              <a:t>、過剰は高血糖・感染</a:t>
-            </a:r>
-            <a:endParaRPr lang="ja-JP" sz="2800" dirty="0"/>
-          </a:p>
-          <a:p>
-            <a:pPr algn="l" marL="406400" indent="-406400">
-              <a:spcAft>
-                <a:spcPts val="2200"/>
-              </a:spcAft>
-              <a:buSzPct val="100000"/>
-              <a:buChar char="•"/>
-            </a:pPr>
-            <a:r>
-              <a:rPr lang="ja-JP" altLang="en-US" sz="2800" b="1" dirty="0">
-                <a:solidFill>
-                  <a:srgbClr val="00A8AA"/>
+                  <a:srgbClr val="262626"/>
                 </a:solidFill>
                 <a:latin typeface="メイリオ" pitchFamily="34" charset="0"/>
                 <a:ea typeface="メイリオ" pitchFamily="34" charset="-122"/>
@@ -8264,7 +8369,7 @@
           </a:xfrm>
           <a:prstGeom prst="roundRect">
             <a:avLst>
-              <a:gd name="adj" fmla="val 15625"/>
+              <a:gd name="adj" fmla="val 7813"/>
             </a:avLst>
           </a:prstGeom>
           <a:solidFill>
@@ -8280,7 +8385,7 @@
               <a:buNone/>
             </a:pPr>
             <a:r>
-              <a:rPr lang="ja-JP" altLang="en-US" sz="1100" dirty="0">
+              <a:rPr lang="ja-JP" altLang="en-US" sz="1050" dirty="0">
                 <a:solidFill>
                   <a:srgbClr val="404040"/>
                 </a:solidFill>
@@ -8290,14 +8395,14 @@
               </a:rPr>
               <a:t>予防的</a:t>
             </a:r>
-            <a:endParaRPr lang="ja-JP" sz="1100" dirty="0"/>
+            <a:endParaRPr lang="ja-JP" sz="1050" dirty="0"/>
           </a:p>
           <a:p>
             <a:pPr algn="ctr" indent="0" marL="0">
               <a:buNone/>
             </a:pPr>
             <a:r>
-              <a:rPr lang="ja-JP" altLang="en-US" sz="1100" dirty="0">
+              <a:rPr lang="ja-JP" altLang="en-US" sz="1050" dirty="0">
                 <a:solidFill>
                   <a:srgbClr val="404040"/>
                 </a:solidFill>
@@ -8307,7 +8412,7 @@
               </a:rPr>
               <a:t>抗菌薬</a:t>
             </a:r>
-            <a:endParaRPr lang="ja-JP" sz="1100" dirty="0"/>
+            <a:endParaRPr lang="ja-JP" sz="1050" dirty="0"/>
           </a:p>
         </p:txBody>
       </p:sp>
@@ -8324,7 +8429,7 @@
           </a:xfrm>
           <a:prstGeom prst="roundRect">
             <a:avLst>
-              <a:gd name="adj" fmla="val 15625"/>
+              <a:gd name="adj" fmla="val 7813"/>
             </a:avLst>
           </a:prstGeom>
           <a:solidFill>
@@ -8340,7 +8445,7 @@
               <a:buNone/>
             </a:pPr>
             <a:r>
-              <a:rPr lang="ja-JP" altLang="en-US" sz="1100" dirty="0">
+              <a:rPr lang="ja-JP" altLang="en-US" sz="1050" dirty="0">
                 <a:solidFill>
                   <a:srgbClr val="404040"/>
                 </a:solidFill>
@@ -8350,14 +8455,14 @@
               </a:rPr>
               <a:t>抗コリン</a:t>
             </a:r>
-            <a:endParaRPr lang="ja-JP" sz="1100" dirty="0"/>
+            <a:endParaRPr lang="ja-JP" sz="1050" dirty="0"/>
           </a:p>
           <a:p>
             <a:pPr algn="ctr" indent="0" marL="0">
               <a:buNone/>
             </a:pPr>
             <a:r>
-              <a:rPr lang="ja-JP" altLang="en-US" sz="1100" dirty="0">
+              <a:rPr lang="ja-JP" altLang="en-US" sz="1050" dirty="0">
                 <a:solidFill>
                   <a:srgbClr val="404040"/>
                 </a:solidFill>
@@ -8367,7 +8472,7 @@
               </a:rPr>
               <a:t>薬</a:t>
             </a:r>
-            <a:endParaRPr lang="ja-JP" sz="1100" dirty="0"/>
+            <a:endParaRPr lang="ja-JP" sz="1050" dirty="0"/>
           </a:p>
         </p:txBody>
       </p:sp>
@@ -8384,7 +8489,7 @@
           </a:xfrm>
           <a:prstGeom prst="roundRect">
             <a:avLst>
-              <a:gd name="adj" fmla="val 15625"/>
+              <a:gd name="adj" fmla="val 7813"/>
             </a:avLst>
           </a:prstGeom>
           <a:solidFill>
@@ -8400,7 +8505,7 @@
               <a:buNone/>
             </a:pPr>
             <a:r>
-              <a:rPr lang="ja-JP" altLang="en-US" sz="1100" dirty="0">
+              <a:rPr lang="ja-JP" altLang="en-US" sz="1050" dirty="0">
                 <a:solidFill>
                   <a:srgbClr val="404040"/>
                 </a:solidFill>
@@ -8410,14 +8515,14 @@
               </a:rPr>
               <a:t>ステロ</a:t>
             </a:r>
-            <a:endParaRPr lang="ja-JP" sz="1100" dirty="0"/>
+            <a:endParaRPr lang="ja-JP" sz="1050" dirty="0"/>
           </a:p>
           <a:p>
             <a:pPr algn="ctr" indent="0" marL="0">
               <a:buNone/>
             </a:pPr>
             <a:r>
-              <a:rPr lang="ja-JP" altLang="en-US" sz="1100" dirty="0">
+              <a:rPr lang="ja-JP" altLang="en-US" sz="1050" dirty="0">
                 <a:solidFill>
                   <a:srgbClr val="404040"/>
                 </a:solidFill>
@@ -8427,7 +8532,7 @@
               </a:rPr>
               <a:t>イド</a:t>
             </a:r>
-            <a:endParaRPr lang="ja-JP" sz="1100" dirty="0"/>
+            <a:endParaRPr lang="ja-JP" sz="1050" dirty="0"/>
           </a:p>
         </p:txBody>
       </p:sp>
@@ -8444,7 +8549,7 @@
           </a:xfrm>
           <a:prstGeom prst="roundRect">
             <a:avLst>
-              <a:gd name="adj" fmla="val 15625"/>
+              <a:gd name="adj" fmla="val 7813"/>
             </a:avLst>
           </a:prstGeom>
           <a:solidFill>
@@ -8460,7 +8565,7 @@
               <a:buNone/>
             </a:pPr>
             <a:r>
-              <a:rPr lang="ja-JP" altLang="en-US" sz="1100" b="1" dirty="0">
+              <a:rPr lang="ja-JP" altLang="en-US" sz="1050" b="1" dirty="0">
                 <a:solidFill>
                   <a:srgbClr val="FFFFFF"/>
                 </a:solidFill>
@@ -8470,7 +8575,7 @@
               </a:rPr>
               <a:t>まとめ</a:t>
             </a:r>
-            <a:endParaRPr lang="ja-JP" sz="1100" dirty="0"/>
+            <a:endParaRPr lang="ja-JP" sz="1050" dirty="0"/>
           </a:p>
         </p:txBody>
       </p:sp>

--- a/slides/3-12_other_perioperative_drugs/3-12_other_perioperative_drugs.pptx
+++ b/slides/3-12_other_perioperative_drugs/3-12_other_perioperative_drugs.pptx
@@ -2208,7 +2208,7 @@
           <a:ln/>
         </p:spPr>
         <p:txBody>
-          <a:bodyPr wrap="square" lIns="0" tIns="0" rIns="0" bIns="0" rtlCol="0" anchor="ctr"/>
+          <a:bodyPr wrap="none" lIns="0" tIns="0" rIns="0" bIns="0" rtlCol="0" anchor="ctr"/>
           <a:lstStyle/>
           <a:p>
             <a:pPr algn="ctr" indent="0" marL="0">
@@ -2268,7 +2268,7 @@
           <a:ln/>
         </p:spPr>
         <p:txBody>
-          <a:bodyPr wrap="square" lIns="0" tIns="0" rIns="0" bIns="0" rtlCol="0" anchor="ctr"/>
+          <a:bodyPr wrap="none" lIns="0" tIns="0" rIns="0" bIns="0" rtlCol="0" anchor="ctr"/>
           <a:lstStyle/>
           <a:p>
             <a:pPr algn="ctr" indent="0" marL="0">
@@ -2328,7 +2328,7 @@
           <a:ln/>
         </p:spPr>
         <p:txBody>
-          <a:bodyPr wrap="square" lIns="0" tIns="0" rIns="0" bIns="0" rtlCol="0" anchor="ctr"/>
+          <a:bodyPr wrap="none" lIns="0" tIns="0" rIns="0" bIns="0" rtlCol="0" anchor="ctr"/>
           <a:lstStyle/>
           <a:p>
             <a:pPr algn="ctr" indent="0" marL="0">
@@ -2388,7 +2388,7 @@
           <a:ln/>
         </p:spPr>
         <p:txBody>
-          <a:bodyPr wrap="square" lIns="0" tIns="0" rIns="0" bIns="0" rtlCol="0" anchor="ctr"/>
+          <a:bodyPr wrap="none" lIns="0" tIns="0" rIns="0" bIns="0" rtlCol="0" anchor="ctr"/>
           <a:lstStyle/>
           <a:p>
             <a:pPr algn="ctr" indent="0" marL="0">
@@ -2869,7 +2869,7 @@
           <a:ln/>
         </p:spPr>
         <p:txBody>
-          <a:bodyPr wrap="square" lIns="0" tIns="0" rIns="0" bIns="0" rtlCol="0" anchor="ctr"/>
+          <a:bodyPr wrap="none" lIns="0" tIns="0" rIns="0" bIns="0" rtlCol="0" anchor="ctr"/>
           <a:lstStyle/>
           <a:p>
             <a:pPr algn="ctr" indent="0" marL="0">
@@ -2929,7 +2929,7 @@
           <a:ln/>
         </p:spPr>
         <p:txBody>
-          <a:bodyPr wrap="square" lIns="0" tIns="0" rIns="0" bIns="0" rtlCol="0" anchor="ctr"/>
+          <a:bodyPr wrap="none" lIns="0" tIns="0" rIns="0" bIns="0" rtlCol="0" anchor="ctr"/>
           <a:lstStyle/>
           <a:p>
             <a:pPr algn="ctr" indent="0" marL="0">
@@ -2989,7 +2989,7 @@
           <a:ln/>
         </p:spPr>
         <p:txBody>
-          <a:bodyPr wrap="square" lIns="0" tIns="0" rIns="0" bIns="0" rtlCol="0" anchor="ctr"/>
+          <a:bodyPr wrap="none" lIns="0" tIns="0" rIns="0" bIns="0" rtlCol="0" anchor="ctr"/>
           <a:lstStyle/>
           <a:p>
             <a:pPr algn="ctr" indent="0" marL="0">
@@ -3049,7 +3049,7 @@
           <a:ln/>
         </p:spPr>
         <p:txBody>
-          <a:bodyPr wrap="square" lIns="0" tIns="0" rIns="0" bIns="0" rtlCol="0" anchor="ctr"/>
+          <a:bodyPr wrap="none" lIns="0" tIns="0" rIns="0" bIns="0" rtlCol="0" anchor="ctr"/>
           <a:lstStyle/>
           <a:p>
             <a:pPr algn="ctr" indent="0" marL="0">
@@ -3948,7 +3948,7 @@
           <a:ln/>
         </p:spPr>
         <p:txBody>
-          <a:bodyPr wrap="square" lIns="0" tIns="0" rIns="0" bIns="0" rtlCol="0" anchor="ctr"/>
+          <a:bodyPr wrap="none" lIns="0" tIns="0" rIns="0" bIns="0" rtlCol="0" anchor="ctr"/>
           <a:lstStyle/>
           <a:p>
             <a:pPr algn="ctr" indent="0" marL="0">
@@ -4008,7 +4008,7 @@
           <a:ln/>
         </p:spPr>
         <p:txBody>
-          <a:bodyPr wrap="square" lIns="0" tIns="0" rIns="0" bIns="0" rtlCol="0" anchor="ctr"/>
+          <a:bodyPr wrap="none" lIns="0" tIns="0" rIns="0" bIns="0" rtlCol="0" anchor="ctr"/>
           <a:lstStyle/>
           <a:p>
             <a:pPr algn="ctr" indent="0" marL="0">
@@ -4068,7 +4068,7 @@
           <a:ln/>
         </p:spPr>
         <p:txBody>
-          <a:bodyPr wrap="square" lIns="0" tIns="0" rIns="0" bIns="0" rtlCol="0" anchor="ctr"/>
+          <a:bodyPr wrap="none" lIns="0" tIns="0" rIns="0" bIns="0" rtlCol="0" anchor="ctr"/>
           <a:lstStyle/>
           <a:p>
             <a:pPr algn="ctr" indent="0" marL="0">
@@ -4128,7 +4128,7 @@
           <a:ln/>
         </p:spPr>
         <p:txBody>
-          <a:bodyPr wrap="square" lIns="0" tIns="0" rIns="0" bIns="0" rtlCol="0" anchor="ctr"/>
+          <a:bodyPr wrap="none" lIns="0" tIns="0" rIns="0" bIns="0" rtlCol="0" anchor="ctr"/>
           <a:lstStyle/>
           <a:p>
             <a:pPr algn="ctr" indent="0" marL="0">
@@ -4570,7 +4570,7 @@
           <a:ln/>
         </p:spPr>
         <p:txBody>
-          <a:bodyPr wrap="square" lIns="0" tIns="0" rIns="0" bIns="0" rtlCol="0" anchor="ctr"/>
+          <a:bodyPr wrap="none" lIns="0" tIns="0" rIns="0" bIns="0" rtlCol="0" anchor="ctr"/>
           <a:lstStyle/>
           <a:p>
             <a:pPr algn="ctr" indent="0" marL="0">
@@ -4630,7 +4630,7 @@
           <a:ln/>
         </p:spPr>
         <p:txBody>
-          <a:bodyPr wrap="square" lIns="0" tIns="0" rIns="0" bIns="0" rtlCol="0" anchor="ctr"/>
+          <a:bodyPr wrap="none" lIns="0" tIns="0" rIns="0" bIns="0" rtlCol="0" anchor="ctr"/>
           <a:lstStyle/>
           <a:p>
             <a:pPr algn="ctr" indent="0" marL="0">
@@ -4690,7 +4690,7 @@
           <a:ln/>
         </p:spPr>
         <p:txBody>
-          <a:bodyPr wrap="square" lIns="0" tIns="0" rIns="0" bIns="0" rtlCol="0" anchor="ctr"/>
+          <a:bodyPr wrap="none" lIns="0" tIns="0" rIns="0" bIns="0" rtlCol="0" anchor="ctr"/>
           <a:lstStyle/>
           <a:p>
             <a:pPr algn="ctr" indent="0" marL="0">
@@ -4750,7 +4750,7 @@
           <a:ln/>
         </p:spPr>
         <p:txBody>
-          <a:bodyPr wrap="square" lIns="0" tIns="0" rIns="0" bIns="0" rtlCol="0" anchor="ctr"/>
+          <a:bodyPr wrap="none" lIns="0" tIns="0" rIns="0" bIns="0" rtlCol="0" anchor="ctr"/>
           <a:lstStyle/>
           <a:p>
             <a:pPr algn="ctr" indent="0" marL="0">
@@ -5772,7 +5772,7 @@
           <a:ln/>
         </p:spPr>
         <p:txBody>
-          <a:bodyPr wrap="square" lIns="0" tIns="0" rIns="0" bIns="0" rtlCol="0" anchor="ctr"/>
+          <a:bodyPr wrap="none" lIns="0" tIns="0" rIns="0" bIns="0" rtlCol="0" anchor="ctr"/>
           <a:lstStyle/>
           <a:p>
             <a:pPr algn="ctr" indent="0" marL="0">
@@ -5832,7 +5832,7 @@
           <a:ln/>
         </p:spPr>
         <p:txBody>
-          <a:bodyPr wrap="square" lIns="0" tIns="0" rIns="0" bIns="0" rtlCol="0" anchor="ctr"/>
+          <a:bodyPr wrap="none" lIns="0" tIns="0" rIns="0" bIns="0" rtlCol="0" anchor="ctr"/>
           <a:lstStyle/>
           <a:p>
             <a:pPr algn="ctr" indent="0" marL="0">
@@ -5892,7 +5892,7 @@
           <a:ln/>
         </p:spPr>
         <p:txBody>
-          <a:bodyPr wrap="square" lIns="0" tIns="0" rIns="0" bIns="0" rtlCol="0" anchor="ctr"/>
+          <a:bodyPr wrap="none" lIns="0" tIns="0" rIns="0" bIns="0" rtlCol="0" anchor="ctr"/>
           <a:lstStyle/>
           <a:p>
             <a:pPr algn="ctr" indent="0" marL="0">
@@ -5952,7 +5952,7 @@
           <a:ln/>
         </p:spPr>
         <p:txBody>
-          <a:bodyPr wrap="square" lIns="0" tIns="0" rIns="0" bIns="0" rtlCol="0" anchor="ctr"/>
+          <a:bodyPr wrap="none" lIns="0" tIns="0" rIns="0" bIns="0" rtlCol="0" anchor="ctr"/>
           <a:lstStyle/>
           <a:p>
             <a:pPr algn="ctr" indent="0" marL="0">
@@ -6610,7 +6610,7 @@
           <a:ln/>
         </p:spPr>
         <p:txBody>
-          <a:bodyPr wrap="square" lIns="0" tIns="0" rIns="0" bIns="0" rtlCol="0" anchor="ctr"/>
+          <a:bodyPr wrap="none" lIns="0" tIns="0" rIns="0" bIns="0" rtlCol="0" anchor="ctr"/>
           <a:lstStyle/>
           <a:p>
             <a:pPr algn="ctr" indent="0" marL="0">
@@ -6670,7 +6670,7 @@
           <a:ln/>
         </p:spPr>
         <p:txBody>
-          <a:bodyPr wrap="square" lIns="0" tIns="0" rIns="0" bIns="0" rtlCol="0" anchor="ctr"/>
+          <a:bodyPr wrap="none" lIns="0" tIns="0" rIns="0" bIns="0" rtlCol="0" anchor="ctr"/>
           <a:lstStyle/>
           <a:p>
             <a:pPr algn="ctr" indent="0" marL="0">
@@ -6730,7 +6730,7 @@
           <a:ln/>
         </p:spPr>
         <p:txBody>
-          <a:bodyPr wrap="square" lIns="0" tIns="0" rIns="0" bIns="0" rtlCol="0" anchor="ctr"/>
+          <a:bodyPr wrap="none" lIns="0" tIns="0" rIns="0" bIns="0" rtlCol="0" anchor="ctr"/>
           <a:lstStyle/>
           <a:p>
             <a:pPr algn="ctr" indent="0" marL="0">
@@ -6790,7 +6790,7 @@
           <a:ln/>
         </p:spPr>
         <p:txBody>
-          <a:bodyPr wrap="square" lIns="0" tIns="0" rIns="0" bIns="0" rtlCol="0" anchor="ctr"/>
+          <a:bodyPr wrap="none" lIns="0" tIns="0" rIns="0" bIns="0" rtlCol="0" anchor="ctr"/>
           <a:lstStyle/>
           <a:p>
             <a:pPr algn="ctr" indent="0" marL="0">
@@ -7756,7 +7756,7 @@
           <a:ln/>
         </p:spPr>
         <p:txBody>
-          <a:bodyPr wrap="square" lIns="0" tIns="0" rIns="0" bIns="0" rtlCol="0" anchor="ctr"/>
+          <a:bodyPr wrap="none" lIns="0" tIns="0" rIns="0" bIns="0" rtlCol="0" anchor="ctr"/>
           <a:lstStyle/>
           <a:p>
             <a:pPr algn="ctr" indent="0" marL="0">
@@ -7816,7 +7816,7 @@
           <a:ln/>
         </p:spPr>
         <p:txBody>
-          <a:bodyPr wrap="square" lIns="0" tIns="0" rIns="0" bIns="0" rtlCol="0" anchor="ctr"/>
+          <a:bodyPr wrap="none" lIns="0" tIns="0" rIns="0" bIns="0" rtlCol="0" anchor="ctr"/>
           <a:lstStyle/>
           <a:p>
             <a:pPr algn="ctr" indent="0" marL="0">
@@ -7876,7 +7876,7 @@
           <a:ln/>
         </p:spPr>
         <p:txBody>
-          <a:bodyPr wrap="square" lIns="0" tIns="0" rIns="0" bIns="0" rtlCol="0" anchor="ctr"/>
+          <a:bodyPr wrap="none" lIns="0" tIns="0" rIns="0" bIns="0" rtlCol="0" anchor="ctr"/>
           <a:lstStyle/>
           <a:p>
             <a:pPr algn="ctr" indent="0" marL="0">
@@ -7936,7 +7936,7 @@
           <a:ln/>
         </p:spPr>
         <p:txBody>
-          <a:bodyPr wrap="square" lIns="0" tIns="0" rIns="0" bIns="0" rtlCol="0" anchor="ctr"/>
+          <a:bodyPr wrap="none" lIns="0" tIns="0" rIns="0" bIns="0" rtlCol="0" anchor="ctr"/>
           <a:lstStyle/>
           <a:p>
             <a:pPr algn="ctr" indent="0" marL="0">
@@ -8378,7 +8378,7 @@
           <a:ln/>
         </p:spPr>
         <p:txBody>
-          <a:bodyPr wrap="square" lIns="0" tIns="0" rIns="0" bIns="0" rtlCol="0" anchor="ctr"/>
+          <a:bodyPr wrap="none" lIns="0" tIns="0" rIns="0" bIns="0" rtlCol="0" anchor="ctr"/>
           <a:lstStyle/>
           <a:p>
             <a:pPr algn="ctr" indent="0" marL="0">
@@ -8438,7 +8438,7 @@
           <a:ln/>
         </p:spPr>
         <p:txBody>
-          <a:bodyPr wrap="square" lIns="0" tIns="0" rIns="0" bIns="0" rtlCol="0" anchor="ctr"/>
+          <a:bodyPr wrap="none" lIns="0" tIns="0" rIns="0" bIns="0" rtlCol="0" anchor="ctr"/>
           <a:lstStyle/>
           <a:p>
             <a:pPr algn="ctr" indent="0" marL="0">
@@ -8498,7 +8498,7 @@
           <a:ln/>
         </p:spPr>
         <p:txBody>
-          <a:bodyPr wrap="square" lIns="0" tIns="0" rIns="0" bIns="0" rtlCol="0" anchor="ctr"/>
+          <a:bodyPr wrap="none" lIns="0" tIns="0" rIns="0" bIns="0" rtlCol="0" anchor="ctr"/>
           <a:lstStyle/>
           <a:p>
             <a:pPr algn="ctr" indent="0" marL="0">
@@ -8558,7 +8558,7 @@
           <a:ln/>
         </p:spPr>
         <p:txBody>
-          <a:bodyPr wrap="square" lIns="0" tIns="0" rIns="0" bIns="0" rtlCol="0" anchor="ctr"/>
+          <a:bodyPr wrap="none" lIns="0" tIns="0" rIns="0" bIns="0" rtlCol="0" anchor="ctr"/>
           <a:lstStyle/>
           <a:p>
             <a:pPr algn="ctr" indent="0" marL="0">
